--- a/lecons/F2T/27_S21_L6_P2_Africa_Climate_Soils_Relief.pptx
+++ b/lecons/F2T/27_S21_L6_P2_Africa_Climate_Soils_Relief.pptx
@@ -58,9 +58,14 @@
     <p:sldId id="306" r:id="rId52"/>
     <p:sldId id="307" r:id="rId53"/>
     <p:sldId id="308" r:id="rId54"/>
+    <p:sldId id="309" r:id="rId55"/>
+    <p:sldId id="310" r:id="rId56"/>
+    <p:sldId id="311" r:id="rId57"/>
+    <p:sldId id="312" r:id="rId58"/>
+    <p:sldId id="313" r:id="rId59"/>
   </p:sldIdLst>
   <p:notesMasterIdLst>
-    <p:notesMasterId r:id="rId55"/>
+    <p:notesMasterId r:id="rId60"/>
   </p:notesMasterIdLst>
   <p:sldSz cx="12192000" cy="6858000"/>
   <p:notesSz cx="6858000" cy="12192000"/>
@@ -642,7 +647,7 @@
           <a:p>
             <a:r>
               <a:rPr lang="en-US" dirty="0"/>
-              <a:t>Listen carefully to this situation from real life. Douala gets about 4,000 mm of rain per year, Garoua about 1,000 mm and Maroua about 800 mm. On the Adamawa plateau, the air is cooler than in Garoua. Nadia wonders why. Think about it, because I am going to ask you some questions.</a:t>
+              <a:t>Listen carefully to this situation from real life. Douala gets about 4,000 mm of rain per year, Garoua about 1,000 mm and Maroua about 800 mm. On the Adamawa plateau, the air is cooler than in Garoua. Nadia asks: "Why do the climate, the relief and the soils change so much across Africa?" Think about it, because I am going to ask you some questions.</a:t>
             </a:r>
             <a:endParaRPr lang="en-US" dirty="0"/>
           </a:p>
@@ -818,7 +823,7 @@
           <a:p>
             <a:r>
               <a:rPr lang="en-US" dirty="0"/>
-              <a:t>Good. Nadia does not know why the climate changes from place to place.</a:t>
+              <a:t>Good. Nadia does not know the climates, relief and soils of Africa.</a:t>
             </a:r>
             <a:endParaRPr lang="en-US" dirty="0"/>
           </a:p>
@@ -1170,7 +1175,7 @@
           <a:p>
             <a:r>
               <a:rPr lang="en-US" dirty="0"/>
-              <a:t>Good. It is high: the higher we go, the cooler it is.</a:t>
+              <a:t>Good. It is high (altitude).</a:t>
             </a:r>
             <a:endParaRPr lang="en-US" dirty="0"/>
           </a:p>
@@ -1610,7 +1615,7 @@
           <a:p>
             <a:r>
               <a:rPr lang="en-US" dirty="0"/>
-              <a:t>Here is the question for Activity 1: Which climate is found around the Equator? Which is near the tropics? Take one minute to think and write your answer in your rough notebook.</a:t>
+              <a:t>Here is the question for Activity 1: Which climate is found around the Equator? Take one minute to think and write your answer in your rough notebook.</a:t>
             </a:r>
             <a:endParaRPr lang="en-US" dirty="0"/>
           </a:p>
@@ -1698,7 +1703,7 @@
           <a:p>
             <a:r>
               <a:rPr lang="en-US" dirty="0"/>
-              <a:t>Let us check the answer together. Equatorial near the Equator; desert near the tropics.</a:t>
+              <a:t>Let us check the answer together. The equatorial climate.</a:t>
             </a:r>
             <a:endParaRPr lang="en-US" dirty="0"/>
           </a:p>
@@ -1786,7 +1791,7 @@
           <a:p>
             <a:r>
               <a:rPr lang="en-US" dirty="0"/>
-              <a:t>Activity 2. Look carefully at this picture: tea on the cool highlands of Kenya. Observe every detail before I ask the question.</a:t>
+              <a:t>Activity 2. Look carefully at this picture: tea in the highlands of Kenya. Observe every detail before I ask the question.</a:t>
             </a:r>
             <a:endParaRPr lang="en-US" dirty="0"/>
           </a:p>
@@ -1874,7 +1879,7 @@
           <a:p>
             <a:r>
               <a:rPr lang="en-US" dirty="0"/>
-              <a:t>Here is the question for Activity 2: Nairobi is near the Equator, but it is cool. Why? Take one minute to think and write your answer in your rough notebook.</a:t>
+              <a:t>Here is the question for Activity 2: Why are highlands near the Equator cool? Take one minute to think and write your answer in your rough notebook.</a:t>
             </a:r>
             <a:endParaRPr lang="en-US" dirty="0"/>
           </a:p>
@@ -1962,7 +1967,7 @@
           <a:p>
             <a:r>
               <a:rPr lang="en-US" dirty="0"/>
-              <a:t>Let us check the answer together. It is high. The higher the land, the cooler the air.</a:t>
+              <a:t>Let us check the answer together. The higher the land, the cooler the air.</a:t>
             </a:r>
             <a:endParaRPr lang="en-US" dirty="0"/>
           </a:p>
@@ -2050,7 +2055,7 @@
           <a:p>
             <a:r>
               <a:rPr lang="en-US" dirty="0"/>
-              <a:t>Activity 3. Look carefully at this picture: the Great Rift Valley in Kenya. Observe every detail before I ask the question.</a:t>
+              <a:t>Activity 3. Look carefully at this picture: a long valley in East Africa. Observe every detail before I ask the question.</a:t>
             </a:r>
             <a:endParaRPr lang="en-US" dirty="0"/>
           </a:p>
@@ -2138,7 +2143,7 @@
           <a:p>
             <a:r>
               <a:rPr lang="en-US" dirty="0"/>
-              <a:t>Here is the question for Activity 3: The land has sunk between two lines of cracks. What is this valley called? Take one minute to think and write your answer in your rough notebook.</a:t>
+              <a:t>Here is the question for Activity 3: What is this long valley of East Africa called? Take one minute to think and write your answer in your rough notebook.</a:t>
             </a:r>
             <a:endParaRPr lang="en-US" dirty="0"/>
           </a:p>
@@ -2314,7 +2319,7 @@
           <a:p>
             <a:r>
               <a:rPr lang="en-US" dirty="0"/>
-              <a:t>Activity 4. Look carefully at this picture: the Atlas Mountains in Morocco. Observe every detail before I ask the question.</a:t>
+              <a:t>Activity 4. Look carefully at this picture: mountains of North Africa. Observe every detail before I ask the question.</a:t>
             </a:r>
             <a:endParaRPr lang="en-US" dirty="0"/>
           </a:p>
@@ -2402,7 +2407,7 @@
           <a:p>
             <a:r>
               <a:rPr lang="en-US" dirty="0"/>
-              <a:t>Here is the question for Activity 4: These mountains were formed by folding. Name them. Take one minute to think and write your answer in your rough notebook.</a:t>
+              <a:t>Here is the question for Activity 4: Name these fold mountains of North Africa. Take one minute to think and write your answer in your rough notebook.</a:t>
             </a:r>
             <a:endParaRPr lang="en-US" dirty="0"/>
           </a:p>
@@ -2578,7 +2583,7 @@
           <a:p>
             <a:r>
               <a:rPr lang="en-US" dirty="0"/>
-              <a:t>Let us check the answer together. The Atlas Mountains (also the Cape Ranges).</a:t>
+              <a:t>Let us check the answer together. The Atlas Mountains.</a:t>
             </a:r>
             <a:endParaRPr lang="en-US" dirty="0"/>
           </a:p>
@@ -2666,7 +2671,7 @@
           <a:p>
             <a:r>
               <a:rPr lang="en-US" dirty="0"/>
-              <a:t>Activity 5. Look carefully at this picture: a banana plantation. Observe every detail before I ask the question.</a:t>
+              <a:t>Activity 5. Look carefully at this picture: mount Cameroon. Observe every detail before I ask the question.</a:t>
             </a:r>
             <a:endParaRPr lang="en-US" dirty="0"/>
           </a:p>
@@ -2754,7 +2759,7 @@
           <a:p>
             <a:r>
               <a:rPr lang="en-US" dirty="0"/>
-              <a:t>Here is the question for Activity 5: Near Mount Cameroon, farmers grow bananas and tea. Why are the soils there so fertile? Take one minute to think and write your answer in your rough notebook.</a:t>
+              <a:t>Here is the question for Activity 5: Why are the soils near Mount Cameroon so fertile? Take one minute to think and write your answer in your rough notebook.</a:t>
             </a:r>
             <a:endParaRPr lang="en-US" dirty="0"/>
           </a:p>
@@ -3018,7 +3023,7 @@
           <a:p>
             <a:r>
               <a:rPr lang="en-US" dirty="0"/>
-              <a:t>Let us copy Climate. Africa has the following main types of climate. On this slide we have Equatorial climate and Tropical climate. Write each point on a new line, with the key term first, and explain it in your own words when we revise. When you finish, we go to the next slide.</a:t>
+              <a:t>Let us copy the definitions. The key terms of this lesson are defined as follows. On this slide we have Relief. Write each point on a new line, with the key term first, and explain it in your own words when we revise.</a:t>
             </a:r>
             <a:endParaRPr lang="en-US" dirty="0"/>
           </a:p>
@@ -3106,7 +3111,7 @@
           <a:p>
             <a:r>
               <a:rPr lang="en-US" dirty="0"/>
-              <a:t>We continue with Climate. On this slide we have Desert climate and Mountain climate. Write each point on a new line, with the key term first, and explain it in your own words when we revise.</a:t>
+              <a:t>Let us copy Climate. Africa has the following main climates. Copy the point on Equatorial on the left, then draw the diagram on the right: the climates of Africa. Give it a title and label it clearly.</a:t>
             </a:r>
             <a:endParaRPr lang="en-US" dirty="0"/>
           </a:p>
@@ -3194,7 +3199,7 @@
           <a:p>
             <a:r>
               <a:rPr lang="en-US" dirty="0"/>
-              <a:t>Now draw this illustration in your notebook: climates of Africa. Give it a title and label it clearly.</a:t>
+              <a:t>We continue with Climate. On this slide we have Tropical (savanna), Desert and Mediterranean. Write each point on a new line, with the key term first, and explain it in your own words when we revise. When you finish, we go to the next slide.</a:t>
             </a:r>
             <a:endParaRPr lang="en-US" dirty="0"/>
           </a:p>
@@ -3282,7 +3287,7 @@
           <a:p>
             <a:r>
               <a:rPr lang="en-US" dirty="0"/>
-              <a:t>Let us copy Relief. The relief of Africa has the following features. On this slide we have Plateaux and Basins. Write each point on a new line, with the key term first, and explain it in your own words when we revise. When you finish, we go to the next slide.</a:t>
+              <a:t>We continue with Climate. On this slide we have Mountain. Write each point on a new line, with the key term first, and explain it in your own words when we revise.</a:t>
             </a:r>
             <a:endParaRPr lang="en-US" dirty="0"/>
           </a:p>
@@ -3370,7 +3375,7 @@
           <a:p>
             <a:r>
               <a:rPr lang="en-US" dirty="0"/>
-              <a:t>We continue with Relief. On this slide we have Mountains and Rift Valley. Write each point on a new line, with the key term first, and explain it in your own words when we revise.</a:t>
+              <a:t>Let us copy Relief. Africa has the following relief features. On this slide we have Plateaux. Write each point on a new line, with the key term first, and explain it in your own words when we revise.</a:t>
             </a:r>
             <a:endParaRPr lang="en-US" dirty="0"/>
           </a:p>
@@ -3546,7 +3551,7 @@
           <a:p>
             <a:r>
               <a:rPr lang="en-US" dirty="0"/>
-              <a:t>Let us copy Soils. Africa has the following main types of soils. On this slide we have Red soils and Desert soils. Write each point on a new line, with the key term first, and explain it in your own words when we revise. When you finish, we go to the next slide.</a:t>
+              <a:t>Copy the point on Fold mountains on the left, then draw the diagram on the right: the Atlas Mountains. Give it a title and label it clearly.</a:t>
             </a:r>
             <a:endParaRPr lang="en-US" dirty="0"/>
           </a:p>
@@ -3634,7 +3639,7 @@
           <a:p>
             <a:r>
               <a:rPr lang="en-US" dirty="0"/>
-              <a:t>We continue with Soils. On this slide we have Volcanic soils. Write each point on a new line, with the key term first, and explain it in your own words when we revise.</a:t>
+              <a:t>We continue with Relief. On this slide we have Volcanic mountains. Write each point on a new line, with the key term first, and explain it in your own words when we revise.</a:t>
             </a:r>
             <a:endParaRPr lang="en-US" dirty="0"/>
           </a:p>
@@ -3722,7 +3727,7 @@
           <a:p>
             <a:r>
               <a:rPr lang="en-US" dirty="0"/>
-              <a:t>Now let us check what you have understood. Question 1: Why is Nairobi cool though it is near the Equator? Answer in your exercise book.</a:t>
+              <a:t>Copy the point on Rift Valley on the left, then draw the diagram on the right: the Rift Valley. Give it a title and label it clearly.</a:t>
             </a:r>
             <a:endParaRPr lang="en-US" dirty="0"/>
           </a:p>
@@ -3810,7 +3815,7 @@
           <a:p>
             <a:r>
               <a:rPr lang="en-US" dirty="0"/>
-              <a:t>The expected answer is: because it is high. If you got it right, well done.</a:t>
+              <a:t>We continue with Relief. On this slide we have Basins. Write each point on a new line, with the key term first, and explain it in your own words when we revise.</a:t>
             </a:r>
             <a:endParaRPr lang="en-US" dirty="0"/>
           </a:p>
@@ -3898,7 +3903,7 @@
           <a:p>
             <a:r>
               <a:rPr lang="en-US" dirty="0"/>
-              <a:t>Now let us check what you have understood. Question 2: Why are the soils of Mount Cameroon fertile? Answer in your exercise book.</a:t>
+              <a:t>Let us copy Soils. Africa has the following main soils. On this slide we have Ferrallitic soils, Ferruginous soils and Desert soils. Write each point on a new line, with the key term first, and explain it in your own words when we revise.</a:t>
             </a:r>
             <a:endParaRPr lang="en-US" dirty="0"/>
           </a:p>
@@ -3986,7 +3991,7 @@
           <a:p>
             <a:r>
               <a:rPr lang="en-US" dirty="0"/>
-              <a:t>The expected answer is: they come from volcanic rocks. If you got it right, well done.</a:t>
+              <a:t>Copy the point on Volcanic soils on the left, then draw the diagram on the right: mount Cameroon. Give it a title and label it clearly.</a:t>
             </a:r>
             <a:endParaRPr lang="en-US" dirty="0"/>
           </a:p>
@@ -4074,7 +4079,7 @@
           <a:p>
             <a:r>
               <a:rPr lang="en-US" dirty="0"/>
-              <a:t>For those who need more practice, fill in the blanks in your exercise book. The answers are: number 1, equatorial; number 2, Rift; number 3, volcanic.</a:t>
+              <a:t>We continue with Soils. On this slide we have Alluvial soils. Write each point on a new line, with the key term first, and explain it in your own words when we revise.</a:t>
             </a:r>
             <a:endParaRPr lang="en-US" dirty="0"/>
           </a:p>
@@ -4162,7 +4167,7 @@
           <a:p>
             <a:r>
               <a:rPr lang="en-US" dirty="0"/>
-              <a:t>For your homework: Look at a map of Africa and write the names of three big rivers. Say into which ocean or sea each one flows. We shall correct it at the beginning of our next lesson.</a:t>
+              <a:t>Now let us check what you have understood. Question 1: Why is Nairobi cool though it is near the Equator? Answer in your exercise book.</a:t>
             </a:r>
             <a:endParaRPr lang="en-US" dirty="0"/>
           </a:p>
@@ -4250,7 +4255,7 @@
           <a:p>
             <a:r>
               <a:rPr lang="en-US" dirty="0"/>
-              <a:t>Our next lesson will be on Lesson 6 (Part 3): Africa: Vegetation and Drainage of Africa. Thank you for your attention, and see you next time.</a:t>
+              <a:t>The expected answer is: because it is high. If you got it right, well done.</a:t>
             </a:r>
             <a:endParaRPr lang="en-US" dirty="0"/>
           </a:p>
@@ -4338,7 +4343,7 @@
           <a:p>
             <a:r>
               <a:rPr lang="en-US" dirty="0"/>
-              <a:t>Let us play the bilingual game. I say a word in English, and you give me the French word. Then we do the reverse.</a:t>
+              <a:t>Now let us check what you have understood. Question 2: Why are the soils of Mount Cameroon fertile? Answer in your exercise book.</a:t>
             </a:r>
             <a:endParaRPr lang="en-US" dirty="0"/>
           </a:p>
@@ -4514,7 +4519,7 @@
           <a:p>
             <a:r>
               <a:rPr lang="en-US" dirty="0"/>
-              <a:t>I record this information in the official logbook of the class after the lesson.</a:t>
+              <a:t>The expected answer is: they come from volcanic rocks. If you got it right, well done.</a:t>
             </a:r>
             <a:endParaRPr lang="en-US" dirty="0"/>
           </a:p>
@@ -4602,7 +4607,7 @@
           <a:p>
             <a:r>
               <a:rPr lang="en-US" dirty="0"/>
-              <a:t>I complete the second page of the logbook: the matter taught, the evaluation, the homework and the attendance.</a:t>
+              <a:t>For those who need more practice, fill in the blanks in your exercise book. The answers are: number 1, equatorial; number 2, Rift; number 3, volcanic.</a:t>
             </a:r>
             <a:endParaRPr lang="en-US" dirty="0"/>
           </a:p>
@@ -4690,7 +4695,7 @@
           <a:p>
             <a:r>
               <a:rPr lang="en-US" dirty="0"/>
-              <a:t>This slide is for me, the teacher: it gives the timing of the lesson and what to do if the projector is not available.</a:t>
+              <a:t>For your homework: Look at a map of Africa and write the names of three big rivers. Say into which ocean or sea each one flows. We shall correct it at the beginning of our next lesson.</a:t>
             </a:r>
             <a:endParaRPr lang="en-US" dirty="0"/>
           </a:p>
@@ -4778,7 +4783,7 @@
           <a:p>
             <a:r>
               <a:rPr lang="en-US" dirty="0"/>
-              <a:t>These are the references and picture credits used to prepare this lesson.</a:t>
+              <a:t>Our next lesson will be on Lesson 6 (Part 3): Africa: Vegetation and Drainage of Africa. Thank you for your attention, and see you next time.</a:t>
             </a:r>
             <a:endParaRPr lang="en-US" dirty="0"/>
           </a:p>
@@ -4802,6 +4807,446 @@
             <a:fld id="{F7021451-1387-4CA6-816F-3879F97B5CBC}" type="slidenum">
               <a:rPr lang="en-US"/>
               <a:t>53</a:t>
+            </a:fld>
+            <a:endParaRPr lang="en-US"/>
+          </a:p>
+        </p:txBody>
+      </p:sp>
+    </p:spTree>
+    <p:extLst>
+      <p:ext uri="{BB962C8B-B14F-4D97-AF65-F5344CB8AC3E}">
+        <p14:creationId xmlns:p14="http://schemas.microsoft.com/office/powerpoint/2010/main" val="1024086991"/>
+      </p:ext>
+    </p:extLst>
+  </p:cSld>
+  <p:clrMapOvr>
+    <a:masterClrMapping/>
+  </p:clrMapOvr>
+</p:notes>
+</file>
+
+<file path=ppt/notesSlides/notesSlide54.xml><?xml version="1.0" encoding="utf-8"?>
+<p:notes xmlns:a="http://schemas.openxmlformats.org/drawingml/2006/main" xmlns:r="http://schemas.openxmlformats.org/officeDocument/2006/relationships" xmlns:p="http://schemas.openxmlformats.org/presentationml/2006/main">
+  <p:cSld>
+    <p:spTree>
+      <p:nvGrpSpPr>
+        <p:cNvPr id="1" name=""/>
+        <p:cNvGrpSpPr/>
+        <p:nvPr/>
+      </p:nvGrpSpPr>
+      <p:grpSpPr>
+        <a:xfrm>
+          <a:off x="0" y="0"/>
+          <a:ext cx="0" cy="0"/>
+          <a:chOff x="0" y="0"/>
+          <a:chExt cx="0" cy="0"/>
+        </a:xfrm>
+      </p:grpSpPr>
+      <p:sp>
+        <p:nvSpPr>
+          <p:cNvPr id="2" name="Slide Image Placeholder 1"/>
+          <p:cNvSpPr>
+            <a:spLocks noGrp="1" noRot="1" noChangeAspect="1"/>
+          </p:cNvSpPr>
+          <p:nvPr>
+            <p:ph type="sldImg"/>
+          </p:nvPr>
+        </p:nvSpPr>
+        <p:spPr/>
+      </p:sp>
+      <p:sp>
+        <p:nvSpPr>
+          <p:cNvPr id="3" name="Notes Placeholder 2"/>
+          <p:cNvSpPr>
+            <a:spLocks noGrp="1"/>
+          </p:cNvSpPr>
+          <p:nvPr>
+            <p:ph type="body" idx="1"/>
+          </p:nvPr>
+        </p:nvSpPr>
+        <p:spPr/>
+        <p:txBody>
+          <a:bodyPr/>
+          <a:lstStyle/>
+          <a:p>
+            <a:r>
+              <a:rPr lang="en-US" dirty="0"/>
+              <a:t>Let us play the bilingual game. I say a word in English, and you give me the French word. Then we do the reverse.</a:t>
+            </a:r>
+            <a:endParaRPr lang="en-US" dirty="0"/>
+          </a:p>
+        </p:txBody>
+      </p:sp>
+      <p:sp>
+        <p:nvSpPr>
+          <p:cNvPr id="4" name="Slide Number Placeholder 3"/>
+          <p:cNvSpPr>
+            <a:spLocks noGrp="1"/>
+          </p:cNvSpPr>
+          <p:nvPr>
+            <p:ph type="sldNum" sz="quarter" idx="10"/>
+          </p:nvPr>
+        </p:nvSpPr>
+        <p:spPr/>
+        <p:txBody>
+          <a:bodyPr/>
+          <a:lstStyle/>
+          <a:p>
+            <a:fld id="{F7021451-1387-4CA6-816F-3879F97B5CBC}" type="slidenum">
+              <a:rPr lang="en-US"/>
+              <a:t>54</a:t>
+            </a:fld>
+            <a:endParaRPr lang="en-US"/>
+          </a:p>
+        </p:txBody>
+      </p:sp>
+    </p:spTree>
+    <p:extLst>
+      <p:ext uri="{BB962C8B-B14F-4D97-AF65-F5344CB8AC3E}">
+        <p14:creationId xmlns:p14="http://schemas.microsoft.com/office/powerpoint/2010/main" val="1024086991"/>
+      </p:ext>
+    </p:extLst>
+  </p:cSld>
+  <p:clrMapOvr>
+    <a:masterClrMapping/>
+  </p:clrMapOvr>
+</p:notes>
+</file>
+
+<file path=ppt/notesSlides/notesSlide55.xml><?xml version="1.0" encoding="utf-8"?>
+<p:notes xmlns:a="http://schemas.openxmlformats.org/drawingml/2006/main" xmlns:r="http://schemas.openxmlformats.org/officeDocument/2006/relationships" xmlns:p="http://schemas.openxmlformats.org/presentationml/2006/main">
+  <p:cSld>
+    <p:spTree>
+      <p:nvGrpSpPr>
+        <p:cNvPr id="1" name=""/>
+        <p:cNvGrpSpPr/>
+        <p:nvPr/>
+      </p:nvGrpSpPr>
+      <p:grpSpPr>
+        <a:xfrm>
+          <a:off x="0" y="0"/>
+          <a:ext cx="0" cy="0"/>
+          <a:chOff x="0" y="0"/>
+          <a:chExt cx="0" cy="0"/>
+        </a:xfrm>
+      </p:grpSpPr>
+      <p:sp>
+        <p:nvSpPr>
+          <p:cNvPr id="2" name="Slide Image Placeholder 1"/>
+          <p:cNvSpPr>
+            <a:spLocks noGrp="1" noRot="1" noChangeAspect="1"/>
+          </p:cNvSpPr>
+          <p:nvPr>
+            <p:ph type="sldImg"/>
+          </p:nvPr>
+        </p:nvSpPr>
+        <p:spPr/>
+      </p:sp>
+      <p:sp>
+        <p:nvSpPr>
+          <p:cNvPr id="3" name="Notes Placeholder 2"/>
+          <p:cNvSpPr>
+            <a:spLocks noGrp="1"/>
+          </p:cNvSpPr>
+          <p:nvPr>
+            <p:ph type="body" idx="1"/>
+          </p:nvPr>
+        </p:nvSpPr>
+        <p:spPr/>
+        <p:txBody>
+          <a:bodyPr/>
+          <a:lstStyle/>
+          <a:p>
+            <a:r>
+              <a:rPr lang="en-US" dirty="0"/>
+              <a:t>I record this information in the official logbook of the class after the lesson.</a:t>
+            </a:r>
+            <a:endParaRPr lang="en-US" dirty="0"/>
+          </a:p>
+        </p:txBody>
+      </p:sp>
+      <p:sp>
+        <p:nvSpPr>
+          <p:cNvPr id="4" name="Slide Number Placeholder 3"/>
+          <p:cNvSpPr>
+            <a:spLocks noGrp="1"/>
+          </p:cNvSpPr>
+          <p:nvPr>
+            <p:ph type="sldNum" sz="quarter" idx="10"/>
+          </p:nvPr>
+        </p:nvSpPr>
+        <p:spPr/>
+        <p:txBody>
+          <a:bodyPr/>
+          <a:lstStyle/>
+          <a:p>
+            <a:fld id="{F7021451-1387-4CA6-816F-3879F97B5CBC}" type="slidenum">
+              <a:rPr lang="en-US"/>
+              <a:t>55</a:t>
+            </a:fld>
+            <a:endParaRPr lang="en-US"/>
+          </a:p>
+        </p:txBody>
+      </p:sp>
+    </p:spTree>
+    <p:extLst>
+      <p:ext uri="{BB962C8B-B14F-4D97-AF65-F5344CB8AC3E}">
+        <p14:creationId xmlns:p14="http://schemas.microsoft.com/office/powerpoint/2010/main" val="1024086991"/>
+      </p:ext>
+    </p:extLst>
+  </p:cSld>
+  <p:clrMapOvr>
+    <a:masterClrMapping/>
+  </p:clrMapOvr>
+</p:notes>
+</file>
+
+<file path=ppt/notesSlides/notesSlide56.xml><?xml version="1.0" encoding="utf-8"?>
+<p:notes xmlns:a="http://schemas.openxmlformats.org/drawingml/2006/main" xmlns:r="http://schemas.openxmlformats.org/officeDocument/2006/relationships" xmlns:p="http://schemas.openxmlformats.org/presentationml/2006/main">
+  <p:cSld>
+    <p:spTree>
+      <p:nvGrpSpPr>
+        <p:cNvPr id="1" name=""/>
+        <p:cNvGrpSpPr/>
+        <p:nvPr/>
+      </p:nvGrpSpPr>
+      <p:grpSpPr>
+        <a:xfrm>
+          <a:off x="0" y="0"/>
+          <a:ext cx="0" cy="0"/>
+          <a:chOff x="0" y="0"/>
+          <a:chExt cx="0" cy="0"/>
+        </a:xfrm>
+      </p:grpSpPr>
+      <p:sp>
+        <p:nvSpPr>
+          <p:cNvPr id="2" name="Slide Image Placeholder 1"/>
+          <p:cNvSpPr>
+            <a:spLocks noGrp="1" noRot="1" noChangeAspect="1"/>
+          </p:cNvSpPr>
+          <p:nvPr>
+            <p:ph type="sldImg"/>
+          </p:nvPr>
+        </p:nvSpPr>
+        <p:spPr/>
+      </p:sp>
+      <p:sp>
+        <p:nvSpPr>
+          <p:cNvPr id="3" name="Notes Placeholder 2"/>
+          <p:cNvSpPr>
+            <a:spLocks noGrp="1"/>
+          </p:cNvSpPr>
+          <p:nvPr>
+            <p:ph type="body" idx="1"/>
+          </p:nvPr>
+        </p:nvSpPr>
+        <p:spPr/>
+        <p:txBody>
+          <a:bodyPr/>
+          <a:lstStyle/>
+          <a:p>
+            <a:r>
+              <a:rPr lang="en-US" dirty="0"/>
+              <a:t>I complete the second page of the logbook: the matter taught, the evaluation, the homework and the attendance.</a:t>
+            </a:r>
+            <a:endParaRPr lang="en-US" dirty="0"/>
+          </a:p>
+        </p:txBody>
+      </p:sp>
+      <p:sp>
+        <p:nvSpPr>
+          <p:cNvPr id="4" name="Slide Number Placeholder 3"/>
+          <p:cNvSpPr>
+            <a:spLocks noGrp="1"/>
+          </p:cNvSpPr>
+          <p:nvPr>
+            <p:ph type="sldNum" sz="quarter" idx="10"/>
+          </p:nvPr>
+        </p:nvSpPr>
+        <p:spPr/>
+        <p:txBody>
+          <a:bodyPr/>
+          <a:lstStyle/>
+          <a:p>
+            <a:fld id="{F7021451-1387-4CA6-816F-3879F97B5CBC}" type="slidenum">
+              <a:rPr lang="en-US"/>
+              <a:t>56</a:t>
+            </a:fld>
+            <a:endParaRPr lang="en-US"/>
+          </a:p>
+        </p:txBody>
+      </p:sp>
+    </p:spTree>
+    <p:extLst>
+      <p:ext uri="{BB962C8B-B14F-4D97-AF65-F5344CB8AC3E}">
+        <p14:creationId xmlns:p14="http://schemas.microsoft.com/office/powerpoint/2010/main" val="1024086991"/>
+      </p:ext>
+    </p:extLst>
+  </p:cSld>
+  <p:clrMapOvr>
+    <a:masterClrMapping/>
+  </p:clrMapOvr>
+</p:notes>
+</file>
+
+<file path=ppt/notesSlides/notesSlide57.xml><?xml version="1.0" encoding="utf-8"?>
+<p:notes xmlns:a="http://schemas.openxmlformats.org/drawingml/2006/main" xmlns:r="http://schemas.openxmlformats.org/officeDocument/2006/relationships" xmlns:p="http://schemas.openxmlformats.org/presentationml/2006/main">
+  <p:cSld>
+    <p:spTree>
+      <p:nvGrpSpPr>
+        <p:cNvPr id="1" name=""/>
+        <p:cNvGrpSpPr/>
+        <p:nvPr/>
+      </p:nvGrpSpPr>
+      <p:grpSpPr>
+        <a:xfrm>
+          <a:off x="0" y="0"/>
+          <a:ext cx="0" cy="0"/>
+          <a:chOff x="0" y="0"/>
+          <a:chExt cx="0" cy="0"/>
+        </a:xfrm>
+      </p:grpSpPr>
+      <p:sp>
+        <p:nvSpPr>
+          <p:cNvPr id="2" name="Slide Image Placeholder 1"/>
+          <p:cNvSpPr>
+            <a:spLocks noGrp="1" noRot="1" noChangeAspect="1"/>
+          </p:cNvSpPr>
+          <p:nvPr>
+            <p:ph type="sldImg"/>
+          </p:nvPr>
+        </p:nvSpPr>
+        <p:spPr/>
+      </p:sp>
+      <p:sp>
+        <p:nvSpPr>
+          <p:cNvPr id="3" name="Notes Placeholder 2"/>
+          <p:cNvSpPr>
+            <a:spLocks noGrp="1"/>
+          </p:cNvSpPr>
+          <p:nvPr>
+            <p:ph type="body" idx="1"/>
+          </p:nvPr>
+        </p:nvSpPr>
+        <p:spPr/>
+        <p:txBody>
+          <a:bodyPr/>
+          <a:lstStyle/>
+          <a:p>
+            <a:r>
+              <a:rPr lang="en-US" dirty="0"/>
+              <a:t>This slide is for me, the teacher: it gives the timing of the lesson and what to do if the projector is not available.</a:t>
+            </a:r>
+            <a:endParaRPr lang="en-US" dirty="0"/>
+          </a:p>
+        </p:txBody>
+      </p:sp>
+      <p:sp>
+        <p:nvSpPr>
+          <p:cNvPr id="4" name="Slide Number Placeholder 3"/>
+          <p:cNvSpPr>
+            <a:spLocks noGrp="1"/>
+          </p:cNvSpPr>
+          <p:nvPr>
+            <p:ph type="sldNum" sz="quarter" idx="10"/>
+          </p:nvPr>
+        </p:nvSpPr>
+        <p:spPr/>
+        <p:txBody>
+          <a:bodyPr/>
+          <a:lstStyle/>
+          <a:p>
+            <a:fld id="{F7021451-1387-4CA6-816F-3879F97B5CBC}" type="slidenum">
+              <a:rPr lang="en-US"/>
+              <a:t>57</a:t>
+            </a:fld>
+            <a:endParaRPr lang="en-US"/>
+          </a:p>
+        </p:txBody>
+      </p:sp>
+    </p:spTree>
+    <p:extLst>
+      <p:ext uri="{BB962C8B-B14F-4D97-AF65-F5344CB8AC3E}">
+        <p14:creationId xmlns:p14="http://schemas.microsoft.com/office/powerpoint/2010/main" val="1024086991"/>
+      </p:ext>
+    </p:extLst>
+  </p:cSld>
+  <p:clrMapOvr>
+    <a:masterClrMapping/>
+  </p:clrMapOvr>
+</p:notes>
+</file>
+
+<file path=ppt/notesSlides/notesSlide58.xml><?xml version="1.0" encoding="utf-8"?>
+<p:notes xmlns:a="http://schemas.openxmlformats.org/drawingml/2006/main" xmlns:r="http://schemas.openxmlformats.org/officeDocument/2006/relationships" xmlns:p="http://schemas.openxmlformats.org/presentationml/2006/main">
+  <p:cSld>
+    <p:spTree>
+      <p:nvGrpSpPr>
+        <p:cNvPr id="1" name=""/>
+        <p:cNvGrpSpPr/>
+        <p:nvPr/>
+      </p:nvGrpSpPr>
+      <p:grpSpPr>
+        <a:xfrm>
+          <a:off x="0" y="0"/>
+          <a:ext cx="0" cy="0"/>
+          <a:chOff x="0" y="0"/>
+          <a:chExt cx="0" cy="0"/>
+        </a:xfrm>
+      </p:grpSpPr>
+      <p:sp>
+        <p:nvSpPr>
+          <p:cNvPr id="2" name="Slide Image Placeholder 1"/>
+          <p:cNvSpPr>
+            <a:spLocks noGrp="1" noRot="1" noChangeAspect="1"/>
+          </p:cNvSpPr>
+          <p:nvPr>
+            <p:ph type="sldImg"/>
+          </p:nvPr>
+        </p:nvSpPr>
+        <p:spPr/>
+      </p:sp>
+      <p:sp>
+        <p:nvSpPr>
+          <p:cNvPr id="3" name="Notes Placeholder 2"/>
+          <p:cNvSpPr>
+            <a:spLocks noGrp="1"/>
+          </p:cNvSpPr>
+          <p:nvPr>
+            <p:ph type="body" idx="1"/>
+          </p:nvPr>
+        </p:nvSpPr>
+        <p:spPr/>
+        <p:txBody>
+          <a:bodyPr/>
+          <a:lstStyle/>
+          <a:p>
+            <a:r>
+              <a:rPr lang="en-US" dirty="0"/>
+              <a:t>These are the references and picture credits used to prepare this lesson.</a:t>
+            </a:r>
+            <a:endParaRPr lang="en-US" dirty="0"/>
+          </a:p>
+        </p:txBody>
+      </p:sp>
+      <p:sp>
+        <p:nvSpPr>
+          <p:cNvPr id="4" name="Slide Number Placeholder 3"/>
+          <p:cNvSpPr>
+            <a:spLocks noGrp="1"/>
+          </p:cNvSpPr>
+          <p:nvPr>
+            <p:ph type="sldNum" sz="quarter" idx="10"/>
+          </p:nvPr>
+        </p:nvSpPr>
+        <p:spPr/>
+        <p:txBody>
+          <a:bodyPr/>
+          <a:lstStyle/>
+          <a:p>
+            <a:fld id="{F7021451-1387-4CA6-816F-3879F97B5CBC}" type="slidenum">
+              <a:rPr lang="en-US"/>
+              <a:t>58</a:t>
             </a:fld>
             <a:endParaRPr lang="en-US"/>
           </a:p>
@@ -6510,7 +6955,7 @@
         <p:spPr>
           <a:xfrm>
             <a:off x="0" y="658368"/>
-            <a:ext cx="5120640" cy="5833872"/>
+            <a:ext cx="2468880" cy="5833872"/>
           </a:xfrm>
           <a:prstGeom prst="rect">
             <a:avLst/>
@@ -6525,8 +6970,8 @@
         </p:nvSpPr>
         <p:spPr>
           <a:xfrm>
-            <a:off x="5349240" y="1005840"/>
-            <a:ext cx="6522415" cy="731520"/>
+            <a:off x="2697480" y="1005840"/>
+            <a:ext cx="9174175" cy="731520"/>
           </a:xfrm>
           <a:prstGeom prst="rect">
             <a:avLst/>
@@ -6566,8 +7011,8 @@
         </p:nvSpPr>
         <p:spPr>
           <a:xfrm>
-            <a:off x="5349240" y="1783080"/>
-            <a:ext cx="6522415" cy="4663440"/>
+            <a:off x="2697480" y="1783080"/>
+            <a:ext cx="9174175" cy="4663440"/>
           </a:xfrm>
           <a:prstGeom prst="rect">
             <a:avLst/>
@@ -6594,7 +7039,7 @@
                 <a:ea typeface="Times New Roman" pitchFamily="34" charset="-122"/>
                 <a:cs typeface="Times New Roman" pitchFamily="34" charset="-120"/>
               </a:rPr>
-              <a:t>Douala gets about 4,000 mm of rain per year, Garoua about 1,000 mm and Maroua about 800 mm. On the Adamawa plateau, the air is cooler than in Garoua. Nadia wonders why.</a:t>
+              <a:t>Douala gets about 4,000 mm of rain per year, Garoua about 1,000 mm and Maroua about 800 mm. On the Adamawa plateau, the air is cooler than in Garoua. Nadia asks: "Why do the climate, the relief and the soils change so much across Africa?"</a:t>
             </a:r>
             <a:endParaRPr lang="en-US" sz="4000" dirty="0"/>
           </a:p>
@@ -7032,7 +7477,7 @@
                 <a:ea typeface="Times New Roman" pitchFamily="34" charset="-122"/>
                 <a:cs typeface="Times New Roman" pitchFamily="34" charset="-120"/>
               </a:rPr>
-              <a:t>Nadia does not know why the climate changes from place to place.</a:t>
+              <a:t>Nadia does not know the climates, relief and soils of Africa.</a:t>
             </a:r>
             <a:endParaRPr lang="en-US" sz="4000" dirty="0"/>
           </a:p>
@@ -7908,7 +8353,7 @@
                 <a:ea typeface="Times New Roman" pitchFamily="34" charset="-122"/>
                 <a:cs typeface="Times New Roman" pitchFamily="34" charset="-120"/>
               </a:rPr>
-              <a:t>It is high: the higher we go, the cooler it is.</a:t>
+              <a:t>It is high (altitude).</a:t>
             </a:r>
             <a:endParaRPr lang="en-US" sz="4000" dirty="0"/>
           </a:p>
@@ -9374,7 +9819,7 @@
                 <a:ea typeface="Times New Roman" pitchFamily="34" charset="-122"/>
                 <a:cs typeface="Times New Roman" pitchFamily="34" charset="-120"/>
               </a:rPr>
-              <a:t>Which climate is found around the Equator? Which is near the tropics?</a:t>
+              <a:t>Which climate is found around the Equator?</a:t>
             </a:r>
             <a:endParaRPr lang="en-US" sz="4000" dirty="0"/>
           </a:p>
@@ -9593,7 +10038,7 @@
                 <a:ea typeface="Times New Roman" pitchFamily="34" charset="-122"/>
                 <a:cs typeface="Times New Roman" pitchFamily="34" charset="-120"/>
               </a:rPr>
-              <a:t>Equatorial near the Equator; desert near the tropics.</a:t>
+              <a:t>The equatorial climate.</a:t>
             </a:r>
             <a:endParaRPr lang="en-US" sz="4000" dirty="0"/>
           </a:p>
@@ -9807,7 +10252,7 @@
                 <a:ea typeface="Times New Roman" pitchFamily="34" charset="-122"/>
                 <a:cs typeface="Times New Roman" pitchFamily="34" charset="-120"/>
               </a:rPr>
-              <a:t>Tea on the cool highlands of Kenya.</a:t>
+              <a:t>Tea in the highlands of Kenya.</a:t>
             </a:r>
             <a:endParaRPr lang="en-US" sz="1800" dirty="0"/>
           </a:p>
@@ -10026,7 +10471,7 @@
                 <a:ea typeface="Times New Roman" pitchFamily="34" charset="-122"/>
                 <a:cs typeface="Times New Roman" pitchFamily="34" charset="-120"/>
               </a:rPr>
-              <a:t>Nairobi is near the Equator, but it is cool. Why?</a:t>
+              <a:t>Why are highlands near the Equator cool?</a:t>
             </a:r>
             <a:endParaRPr lang="en-US" sz="4000" dirty="0"/>
           </a:p>
@@ -10245,7 +10690,7 @@
                 <a:ea typeface="Times New Roman" pitchFamily="34" charset="-122"/>
                 <a:cs typeface="Times New Roman" pitchFamily="34" charset="-120"/>
               </a:rPr>
-              <a:t>It is high. The higher the land, the cooler the air.</a:t>
+              <a:t>The higher the land, the cooler the air.</a:t>
             </a:r>
             <a:endParaRPr lang="en-US" sz="4000" dirty="0"/>
           </a:p>
@@ -10459,7 +10904,7 @@
                 <a:ea typeface="Times New Roman" pitchFamily="34" charset="-122"/>
                 <a:cs typeface="Times New Roman" pitchFamily="34" charset="-120"/>
               </a:rPr>
-              <a:t>The Great Rift Valley in Kenya.</a:t>
+              <a:t>A long valley in East Africa.</a:t>
             </a:r>
             <a:endParaRPr lang="en-US" sz="1800" dirty="0"/>
           </a:p>
@@ -10678,7 +11123,7 @@
                 <a:ea typeface="Times New Roman" pitchFamily="34" charset="-122"/>
                 <a:cs typeface="Times New Roman" pitchFamily="34" charset="-120"/>
               </a:rPr>
-              <a:t>The land has sunk between two lines of cracks. What is this valley called?</a:t>
+              <a:t>What is this long valley of East Africa called?</a:t>
             </a:r>
             <a:endParaRPr lang="en-US" sz="4000" dirty="0"/>
           </a:p>
@@ -11111,7 +11556,7 @@
                 <a:ea typeface="Times New Roman" pitchFamily="34" charset="-122"/>
                 <a:cs typeface="Times New Roman" pitchFamily="34" charset="-120"/>
               </a:rPr>
-              <a:t>The Atlas Mountains in Morocco.</a:t>
+              <a:t>Mountains of North Africa.</a:t>
             </a:r>
             <a:endParaRPr lang="en-US" sz="1800" dirty="0"/>
           </a:p>
@@ -11330,7 +11775,7 @@
                 <a:ea typeface="Times New Roman" pitchFamily="34" charset="-122"/>
                 <a:cs typeface="Times New Roman" pitchFamily="34" charset="-120"/>
               </a:rPr>
-              <a:t>These mountains were formed by folding. Name them.</a:t>
+              <a:t>Name these fold mountains of North Africa.</a:t>
             </a:r>
             <a:endParaRPr lang="en-US" sz="4000" dirty="0"/>
           </a:p>
@@ -12558,7 +13003,7 @@
                 <a:ea typeface="Times New Roman" pitchFamily="34" charset="-122"/>
                 <a:cs typeface="Times New Roman" pitchFamily="34" charset="-120"/>
               </a:rPr>
-              <a:t>The Atlas Mountains (also the Cape Ranges).</a:t>
+              <a:t>The Atlas Mountains.</a:t>
             </a:r>
             <a:endParaRPr lang="en-US" sz="4000" dirty="0"/>
           </a:p>
@@ -12772,7 +13217,7 @@
                 <a:ea typeface="Times New Roman" pitchFamily="34" charset="-122"/>
                 <a:cs typeface="Times New Roman" pitchFamily="34" charset="-120"/>
               </a:rPr>
-              <a:t>A banana plantation.</a:t>
+              <a:t>Mount Cameroon.</a:t>
             </a:r>
             <a:endParaRPr lang="en-US" sz="1800" dirty="0"/>
           </a:p>
@@ -12991,7 +13436,7 @@
                 <a:ea typeface="Times New Roman" pitchFamily="34" charset="-122"/>
                 <a:cs typeface="Times New Roman" pitchFamily="34" charset="-120"/>
               </a:rPr>
-              <a:t>Near Mount Cameroon, farmers grow bananas and tea. Why are the soils there so fertile?</a:t>
+              <a:t>Why are the soils near Mount Cameroon so fertile?</a:t>
             </a:r>
             <a:endParaRPr lang="en-US" sz="4000" dirty="0"/>
           </a:p>
@@ -13604,7 +14049,7 @@
         <p:spPr>
           <a:xfrm>
             <a:off x="0" y="658368"/>
-            <a:ext cx="2468880" cy="5833872"/>
+            <a:ext cx="5120640" cy="5833872"/>
           </a:xfrm>
           <a:prstGeom prst="rect">
             <a:avLst/>
@@ -13619,8 +14064,8 @@
         </p:nvSpPr>
         <p:spPr>
           <a:xfrm>
-            <a:off x="2697480" y="1005840"/>
-            <a:ext cx="9174175" cy="731520"/>
+            <a:off x="5349240" y="1005840"/>
+            <a:ext cx="6522415" cy="731520"/>
           </a:xfrm>
           <a:prstGeom prst="rect">
             <a:avLst/>
@@ -13646,7 +14091,7 @@
                 <a:ea typeface="Times New Roman" pitchFamily="34" charset="-122"/>
                 <a:cs typeface="Times New Roman" pitchFamily="34" charset="-120"/>
               </a:rPr>
-              <a:t>1. Climate</a:t>
+              <a:t>DEFINITIONS</a:t>
             </a:r>
             <a:endParaRPr lang="en-US" sz="3600" dirty="0"/>
           </a:p>
@@ -13660,8 +14105,8 @@
         </p:nvSpPr>
         <p:spPr>
           <a:xfrm>
-            <a:off x="2697480" y="1783080"/>
-            <a:ext cx="9174175" cy="4663440"/>
+            <a:off x="5349240" y="1783080"/>
+            <a:ext cx="6522415" cy="4663440"/>
           </a:xfrm>
           <a:prstGeom prst="rect">
             <a:avLst/>
@@ -13688,16 +14133,17 @@
                 <a:ea typeface="Times New Roman" pitchFamily="34" charset="-122"/>
                 <a:cs typeface="Times New Roman" pitchFamily="34" charset="-120"/>
               </a:rPr>
-              <a:t>Africa has the following main types of climate:</a:t>
+              <a:t>The key terms of this lesson are defined as follows:</a:t>
             </a:r>
             <a:endParaRPr lang="en-US" sz="4000" dirty="0"/>
           </a:p>
           <a:p>
-            <a:pPr algn="l" indent="0" marL="0">
+            <a:pPr algn="l" marL="342900" indent="-342900">
               <a:spcAft>
                 <a:spcPts val="800"/>
               </a:spcAft>
-              <a:buNone/>
+              <a:buSzPct val="100000"/>
+              <a:buChar char="•"/>
             </a:pPr>
             <a:r>
               <a:rPr lang="en-US" sz="4000" b="1" dirty="0">
@@ -13708,13 +14154,14 @@
                 <a:ea typeface="Times New Roman" pitchFamily="34" charset="-122"/>
                 <a:cs typeface="Times New Roman" pitchFamily="34" charset="-120"/>
               </a:rPr>
-              <a:t>Equatorial climate: </a:t>
-            </a:r>
-            <a:pPr algn="l" indent="0" marL="0">
+              <a:t>Relief: </a:t>
+            </a:r>
+            <a:pPr algn="l" marL="342900" indent="-342900">
               <a:spcAft>
                 <a:spcPts val="800"/>
               </a:spcAft>
-              <a:buNone/>
+              <a:buSzPct val="100000"/>
+              <a:buChar char="•"/>
             </a:pPr>
             <a:r>
               <a:rPr lang="en-US" sz="4000" dirty="0">
@@ -13725,44 +14172,7 @@
                 <a:ea typeface="Times New Roman" pitchFamily="34" charset="-122"/>
                 <a:cs typeface="Times New Roman" pitchFamily="34" charset="-120"/>
               </a:rPr>
-              <a:t>It is hot and wet all year, as in the Congo Basin and southern Cameroon.</a:t>
-            </a:r>
-            <a:endParaRPr lang="en-US" sz="4000" dirty="0"/>
-          </a:p>
-          <a:p>
-            <a:pPr algn="l" indent="0" marL="0">
-              <a:spcAft>
-                <a:spcPts val="800"/>
-              </a:spcAft>
-              <a:buNone/>
-            </a:pPr>
-            <a:r>
-              <a:rPr lang="en-US" sz="4000" b="1" dirty="0">
-                <a:solidFill>
-                  <a:srgbClr val="111111"/>
-                </a:solidFill>
-                <a:latin typeface="Times New Roman" pitchFamily="34" charset="0"/>
-                <a:ea typeface="Times New Roman" pitchFamily="34" charset="-122"/>
-                <a:cs typeface="Times New Roman" pitchFamily="34" charset="-120"/>
-              </a:rPr>
-              <a:t>Tropical climate: </a:t>
-            </a:r>
-            <a:pPr algn="l" indent="0" marL="0">
-              <a:spcAft>
-                <a:spcPts val="800"/>
-              </a:spcAft>
-              <a:buNone/>
-            </a:pPr>
-            <a:r>
-              <a:rPr lang="en-US" sz="4000" dirty="0">
-                <a:solidFill>
-                  <a:srgbClr val="111111"/>
-                </a:solidFill>
-                <a:latin typeface="Times New Roman" pitchFamily="34" charset="0"/>
-                <a:ea typeface="Times New Roman" pitchFamily="34" charset="-122"/>
-                <a:cs typeface="Times New Roman" pitchFamily="34" charset="-120"/>
-              </a:rPr>
-              <a:t>It has a wet season and a dry season, as in Garoua.</a:t>
+              <a:t>It is the shape of the land: mountains, plateaux, valleys and plains.</a:t>
             </a:r>
             <a:endParaRPr lang="en-US" sz="4000" dirty="0"/>
           </a:p>
@@ -13880,9 +14290,131 @@
           </a:p>
         </p:txBody>
       </p:sp>
+      <p:sp>
+        <p:nvSpPr>
+          <p:cNvPr id="3" name="Text 1"/>
+          <p:cNvSpPr/>
+          <p:nvPr/>
+        </p:nvSpPr>
+        <p:spPr>
+          <a:xfrm>
+            <a:off x="365760" y="1005840"/>
+            <a:ext cx="11460175" cy="731520"/>
+          </a:xfrm>
+          <a:prstGeom prst="rect">
+            <a:avLst/>
+          </a:prstGeom>
+          <a:noFill/>
+          <a:ln/>
+        </p:spPr>
+        <p:txBody>
+          <a:bodyPr wrap="square" lIns="0" tIns="0" rIns="0" bIns="0" rtlCol="0" anchor="ctr">
+            <a:normAutofit/>
+          </a:bodyPr>
+          <a:lstStyle/>
+          <a:p>
+            <a:pPr algn="ctr" indent="0" marL="0">
+              <a:buNone/>
+            </a:pPr>
+            <a:r>
+              <a:rPr lang="en-US" sz="3600" b="1" dirty="0">
+                <a:solidFill>
+                  <a:srgbClr val="990011"/>
+                </a:solidFill>
+                <a:latin typeface="Times New Roman" pitchFamily="34" charset="0"/>
+                <a:ea typeface="Times New Roman" pitchFamily="34" charset="-122"/>
+                <a:cs typeface="Times New Roman" pitchFamily="34" charset="-120"/>
+              </a:rPr>
+              <a:t>1. Climate</a:t>
+            </a:r>
+            <a:endParaRPr lang="en-US" sz="3600" dirty="0"/>
+          </a:p>
+        </p:txBody>
+      </p:sp>
+      <p:sp>
+        <p:nvSpPr>
+          <p:cNvPr id="4" name="Text 2"/>
+          <p:cNvSpPr/>
+          <p:nvPr/>
+        </p:nvSpPr>
+        <p:spPr>
+          <a:xfrm>
+            <a:off x="365760" y="1783080"/>
+            <a:ext cx="4846320" cy="4617720"/>
+          </a:xfrm>
+          <a:prstGeom prst="rect">
+            <a:avLst/>
+          </a:prstGeom>
+          <a:noFill/>
+          <a:ln/>
+        </p:spPr>
+        <p:txBody>
+          <a:bodyPr wrap="square" lIns="0" tIns="0" rIns="0" bIns="0" rtlCol="0" anchor="t"/>
+          <a:lstStyle/>
+          <a:p>
+            <a:pPr algn="l" indent="0" marL="0">
+              <a:spcAft>
+                <a:spcPts val="800"/>
+              </a:spcAft>
+              <a:buNone/>
+            </a:pPr>
+            <a:r>
+              <a:rPr lang="en-US" sz="3600" i="1" dirty="0">
+                <a:solidFill>
+                  <a:srgbClr val="111111"/>
+                </a:solidFill>
+                <a:latin typeface="Times New Roman" pitchFamily="34" charset="0"/>
+                <a:ea typeface="Times New Roman" pitchFamily="34" charset="-122"/>
+                <a:cs typeface="Times New Roman" pitchFamily="34" charset="-120"/>
+              </a:rPr>
+              <a:t>Africa has the following main climates:</a:t>
+            </a:r>
+            <a:endParaRPr lang="en-US" sz="3600" dirty="0"/>
+          </a:p>
+          <a:p>
+            <a:pPr algn="l" marL="342900" indent="-342900">
+              <a:spcAft>
+                <a:spcPts val="800"/>
+              </a:spcAft>
+              <a:buSzPct val="100000"/>
+              <a:buChar char="•"/>
+            </a:pPr>
+            <a:r>
+              <a:rPr lang="en-US" sz="3600" b="1" dirty="0">
+                <a:solidFill>
+                  <a:srgbClr val="111111"/>
+                </a:solidFill>
+                <a:latin typeface="Times New Roman" pitchFamily="34" charset="0"/>
+                <a:ea typeface="Times New Roman" pitchFamily="34" charset="-122"/>
+                <a:cs typeface="Times New Roman" pitchFamily="34" charset="-120"/>
+              </a:rPr>
+              <a:t>Equatorial: </a:t>
+            </a:r>
+            <a:pPr algn="l" marL="342900" indent="-342900">
+              <a:spcAft>
+                <a:spcPts val="800"/>
+              </a:spcAft>
+              <a:buSzPct val="100000"/>
+              <a:buChar char="•"/>
+            </a:pPr>
+            <a:r>
+              <a:rPr lang="en-US" sz="3600" dirty="0">
+                <a:solidFill>
+                  <a:srgbClr val="111111"/>
+                </a:solidFill>
+                <a:latin typeface="Times New Roman" pitchFamily="34" charset="0"/>
+                <a:ea typeface="Times New Roman" pitchFamily="34" charset="-122"/>
+                <a:cs typeface="Times New Roman" pitchFamily="34" charset="-120"/>
+              </a:rPr>
+              <a:t>Hot and wet all year, in the Congo Basin.</a:t>
+            </a:r>
+            <a:endParaRPr lang="en-US" sz="3600" dirty="0"/>
+          </a:p>
+        </p:txBody>
+      </p:sp>
       <p:pic>
         <p:nvPicPr>
-          <p:cNvPr id="3" name="Image 0" descr="/home/claude/f4/img/minesec_sheet.png">    </p:cNvPr>
+          <p:cNvPr id="5" name="Image 0" descr="/home/claude/f4/img/v2/africa_climate_big.png">    </p:cNvPr>
           <p:cNvPicPr>
             <a:picLocks noChangeAspect="1"/>
           </p:cNvPicPr>
@@ -13896,8 +14428,8 @@
         </p:blipFill>
         <p:spPr>
           <a:xfrm>
-            <a:off x="0" y="658368"/>
-            <a:ext cx="5120640" cy="5833872"/>
+            <a:off x="5349240" y="2045198"/>
+            <a:ext cx="6659575" cy="3746011"/>
           </a:xfrm>
           <a:prstGeom prst="rect">
             <a:avLst/>
@@ -13906,14 +14438,14 @@
       </p:pic>
       <p:sp>
         <p:nvSpPr>
-          <p:cNvPr id="4" name="Text 1"/>
+          <p:cNvPr id="6" name="Text 3"/>
           <p:cNvSpPr/>
           <p:nvPr/>
         </p:nvSpPr>
         <p:spPr>
           <a:xfrm>
-            <a:off x="5349240" y="1005840"/>
-            <a:ext cx="6522415" cy="731520"/>
+            <a:off x="5349240" y="6089904"/>
+            <a:ext cx="6659575" cy="347472"/>
           </a:xfrm>
           <a:prstGeom prst="rect">
             <a:avLst/>
@@ -13922,122 +14454,24 @@
           <a:ln/>
         </p:spPr>
         <p:txBody>
-          <a:bodyPr wrap="square" lIns="0" tIns="0" rIns="0" bIns="0" rtlCol="0" anchor="ctr">
-            <a:normAutofit/>
-          </a:bodyPr>
+          <a:bodyPr wrap="square" lIns="0" tIns="0" rIns="0" bIns="0" rtlCol="0" anchor="ctr"/>
           <a:lstStyle/>
           <a:p>
             <a:pPr algn="ctr" indent="0" marL="0">
               <a:buNone/>
             </a:pPr>
             <a:r>
-              <a:rPr lang="en-US" sz="3600" b="1" dirty="0">
-                <a:solidFill>
-                  <a:srgbClr val="990011"/>
+              <a:rPr lang="en-US" sz="1600" i="1" dirty="0">
+                <a:solidFill>
+                  <a:srgbClr val="555555"/>
                 </a:solidFill>
                 <a:latin typeface="Times New Roman" pitchFamily="34" charset="0"/>
                 <a:ea typeface="Times New Roman" pitchFamily="34" charset="-122"/>
                 <a:cs typeface="Times New Roman" pitchFamily="34" charset="-120"/>
               </a:rPr>
-              <a:t>1. Climate (continued)</a:t>
-            </a:r>
-            <a:endParaRPr lang="en-US" sz="3600" dirty="0"/>
-          </a:p>
-        </p:txBody>
-      </p:sp>
-      <p:sp>
-        <p:nvSpPr>
-          <p:cNvPr id="5" name="Text 2"/>
-          <p:cNvSpPr/>
-          <p:nvPr/>
-        </p:nvSpPr>
-        <p:spPr>
-          <a:xfrm>
-            <a:off x="5349240" y="1783080"/>
-            <a:ext cx="6522415" cy="4663440"/>
-          </a:xfrm>
-          <a:prstGeom prst="rect">
-            <a:avLst/>
-          </a:prstGeom>
-          <a:noFill/>
-          <a:ln/>
-        </p:spPr>
-        <p:txBody>
-          <a:bodyPr wrap="square" lIns="0" tIns="0" rIns="0" bIns="0" rtlCol="0" anchor="t"/>
-          <a:lstStyle/>
-          <a:p>
-            <a:pPr algn="l" indent="0" marL="0">
-              <a:spcAft>
-                <a:spcPts val="800"/>
-              </a:spcAft>
-              <a:buNone/>
-            </a:pPr>
-            <a:r>
-              <a:rPr lang="en-US" sz="4000" b="1" dirty="0">
-                <a:solidFill>
-                  <a:srgbClr val="111111"/>
-                </a:solidFill>
-                <a:latin typeface="Times New Roman" pitchFamily="34" charset="0"/>
-                <a:ea typeface="Times New Roman" pitchFamily="34" charset="-122"/>
-                <a:cs typeface="Times New Roman" pitchFamily="34" charset="-120"/>
-              </a:rPr>
-              <a:t>Desert climate: </a:t>
-            </a:r>
-            <a:pPr algn="l" indent="0" marL="0">
-              <a:spcAft>
-                <a:spcPts val="800"/>
-              </a:spcAft>
-              <a:buNone/>
-            </a:pPr>
-            <a:r>
-              <a:rPr lang="en-US" sz="4000" dirty="0">
-                <a:solidFill>
-                  <a:srgbClr val="111111"/>
-                </a:solidFill>
-                <a:latin typeface="Times New Roman" pitchFamily="34" charset="0"/>
-                <a:ea typeface="Times New Roman" pitchFamily="34" charset="-122"/>
-                <a:cs typeface="Times New Roman" pitchFamily="34" charset="-120"/>
-              </a:rPr>
-              <a:t>It has very little rain, as in the Sahara.</a:t>
-            </a:r>
-            <a:endParaRPr lang="en-US" sz="4000" dirty="0"/>
-          </a:p>
-          <a:p>
-            <a:pPr algn="l" indent="0" marL="0">
-              <a:spcAft>
-                <a:spcPts val="800"/>
-              </a:spcAft>
-              <a:buNone/>
-            </a:pPr>
-            <a:r>
-              <a:rPr lang="en-US" sz="4000" b="1" dirty="0">
-                <a:solidFill>
-                  <a:srgbClr val="111111"/>
-                </a:solidFill>
-                <a:latin typeface="Times New Roman" pitchFamily="34" charset="0"/>
-                <a:ea typeface="Times New Roman" pitchFamily="34" charset="-122"/>
-                <a:cs typeface="Times New Roman" pitchFamily="34" charset="-120"/>
-              </a:rPr>
-              <a:t>Mountain climate: </a:t>
-            </a:r>
-            <a:pPr algn="l" indent="0" marL="0">
-              <a:spcAft>
-                <a:spcPts val="800"/>
-              </a:spcAft>
-              <a:buNone/>
-            </a:pPr>
-            <a:r>
-              <a:rPr lang="en-US" sz="4000" dirty="0">
-                <a:solidFill>
-                  <a:srgbClr val="111111"/>
-                </a:solidFill>
-                <a:latin typeface="Times New Roman" pitchFamily="34" charset="0"/>
-                <a:ea typeface="Times New Roman" pitchFamily="34" charset="-122"/>
-                <a:cs typeface="Times New Roman" pitchFamily="34" charset="-120"/>
-              </a:rPr>
-              <a:t>It is cooler because of the high altitude, as in the East African highlands.</a:t>
-            </a:r>
-            <a:endParaRPr lang="en-US" sz="4000" dirty="0"/>
+              <a:t>Illustration: the climates of Africa</a:t>
+            </a:r>
+            <a:endParaRPr lang="en-US" sz="1600" dirty="0"/>
           </a:p>
         </p:txBody>
       </p:sp>
@@ -14153,48 +14587,9 @@
           </a:p>
         </p:txBody>
       </p:sp>
-      <p:sp>
-        <p:nvSpPr>
-          <p:cNvPr id="3" name="Text 1"/>
-          <p:cNvSpPr/>
-          <p:nvPr/>
-        </p:nvSpPr>
-        <p:spPr>
-          <a:xfrm>
-            <a:off x="457200" y="1005840"/>
-            <a:ext cx="11277295" cy="731520"/>
-          </a:xfrm>
-          <a:prstGeom prst="rect">
-            <a:avLst/>
-          </a:prstGeom>
-          <a:noFill/>
-          <a:ln/>
-        </p:spPr>
-        <p:txBody>
-          <a:bodyPr wrap="square" lIns="0" tIns="0" rIns="0" bIns="0" rtlCol="0" anchor="ctr"/>
-          <a:lstStyle/>
-          <a:p>
-            <a:pPr algn="ctr" indent="0" marL="0">
-              <a:buNone/>
-            </a:pPr>
-            <a:r>
-              <a:rPr lang="en-US" sz="3600" b="1" dirty="0">
-                <a:solidFill>
-                  <a:srgbClr val="990011"/>
-                </a:solidFill>
-                <a:latin typeface="Times New Roman" pitchFamily="34" charset="0"/>
-                <a:ea typeface="Times New Roman" pitchFamily="34" charset="-122"/>
-                <a:cs typeface="Times New Roman" pitchFamily="34" charset="-120"/>
-              </a:rPr>
-              <a:t>1. Climate</a:t>
-            </a:r>
-            <a:endParaRPr lang="en-US" sz="3600" dirty="0"/>
-          </a:p>
-        </p:txBody>
-      </p:sp>
       <p:pic>
         <p:nvPicPr>
-          <p:cNvPr id="4" name="Image 0" descr="/home/claude/f4/img/v2/africa_climate_big.png">    </p:cNvPr>
+          <p:cNvPr id="3" name="Image 0" descr="/home/claude/f4/img/minesec_sheet.png">    </p:cNvPr>
           <p:cNvPicPr>
             <a:picLocks noChangeAspect="1"/>
           </p:cNvPicPr>
@@ -14208,8 +14603,8 @@
         </p:blipFill>
         <p:spPr>
           <a:xfrm>
-            <a:off x="2300072" y="1783080"/>
-            <a:ext cx="7591552" cy="4270248"/>
+            <a:off x="0" y="658368"/>
+            <a:ext cx="3840480" cy="5833872"/>
           </a:xfrm>
           <a:prstGeom prst="rect">
             <a:avLst/>
@@ -14218,14 +14613,14 @@
       </p:pic>
       <p:sp>
         <p:nvSpPr>
-          <p:cNvPr id="5" name="Text 2"/>
+          <p:cNvPr id="4" name="Text 1"/>
           <p:cNvSpPr/>
           <p:nvPr/>
         </p:nvSpPr>
         <p:spPr>
           <a:xfrm>
-            <a:off x="457200" y="6089904"/>
-            <a:ext cx="11277295" cy="347472"/>
+            <a:off x="4069080" y="1005840"/>
+            <a:ext cx="7802575" cy="731520"/>
           </a:xfrm>
           <a:prstGeom prst="rect">
             <a:avLst/>
@@ -14234,24 +14629,165 @@
           <a:ln/>
         </p:spPr>
         <p:txBody>
-          <a:bodyPr wrap="square" lIns="0" tIns="0" rIns="0" bIns="0" rtlCol="0" anchor="ctr"/>
+          <a:bodyPr wrap="square" lIns="0" tIns="0" rIns="0" bIns="0" rtlCol="0" anchor="ctr">
+            <a:normAutofit/>
+          </a:bodyPr>
           <a:lstStyle/>
           <a:p>
             <a:pPr algn="ctr" indent="0" marL="0">
               <a:buNone/>
             </a:pPr>
             <a:r>
-              <a:rPr lang="en-US" sz="1800" i="1" dirty="0">
-                <a:solidFill>
-                  <a:srgbClr val="555555"/>
+              <a:rPr lang="en-US" sz="3600" b="1" dirty="0">
+                <a:solidFill>
+                  <a:srgbClr val="990011"/>
                 </a:solidFill>
                 <a:latin typeface="Times New Roman" pitchFamily="34" charset="0"/>
                 <a:ea typeface="Times New Roman" pitchFamily="34" charset="-122"/>
                 <a:cs typeface="Times New Roman" pitchFamily="34" charset="-120"/>
               </a:rPr>
-              <a:t>Illustration: climates of Africa</a:t>
-            </a:r>
-            <a:endParaRPr lang="en-US" sz="1800" dirty="0"/>
+              <a:t>1. Climate</a:t>
+            </a:r>
+            <a:endParaRPr lang="en-US" sz="3600" dirty="0"/>
+          </a:p>
+        </p:txBody>
+      </p:sp>
+      <p:sp>
+        <p:nvSpPr>
+          <p:cNvPr id="5" name="Text 2"/>
+          <p:cNvSpPr/>
+          <p:nvPr/>
+        </p:nvSpPr>
+        <p:spPr>
+          <a:xfrm>
+            <a:off x="4069080" y="1783080"/>
+            <a:ext cx="7802575" cy="4663440"/>
+          </a:xfrm>
+          <a:prstGeom prst="rect">
+            <a:avLst/>
+          </a:prstGeom>
+          <a:noFill/>
+          <a:ln/>
+        </p:spPr>
+        <p:txBody>
+          <a:bodyPr wrap="square" lIns="0" tIns="0" rIns="0" bIns="0" rtlCol="0" anchor="t"/>
+          <a:lstStyle/>
+          <a:p>
+            <a:pPr algn="l" marL="342900" indent="-342900">
+              <a:spcAft>
+                <a:spcPts val="800"/>
+              </a:spcAft>
+              <a:buSzPct val="100000"/>
+              <a:buChar char="•"/>
+            </a:pPr>
+            <a:r>
+              <a:rPr lang="en-US" sz="4000" b="1" dirty="0">
+                <a:solidFill>
+                  <a:srgbClr val="111111"/>
+                </a:solidFill>
+                <a:latin typeface="Times New Roman" pitchFamily="34" charset="0"/>
+                <a:ea typeface="Times New Roman" pitchFamily="34" charset="-122"/>
+                <a:cs typeface="Times New Roman" pitchFamily="34" charset="-120"/>
+              </a:rPr>
+              <a:t>Tropical (savanna): </a:t>
+            </a:r>
+            <a:pPr algn="l" marL="342900" indent="-342900">
+              <a:spcAft>
+                <a:spcPts val="800"/>
+              </a:spcAft>
+              <a:buSzPct val="100000"/>
+              <a:buChar char="•"/>
+            </a:pPr>
+            <a:r>
+              <a:rPr lang="en-US" sz="4000" dirty="0">
+                <a:solidFill>
+                  <a:srgbClr val="111111"/>
+                </a:solidFill>
+                <a:latin typeface="Times New Roman" pitchFamily="34" charset="0"/>
+                <a:ea typeface="Times New Roman" pitchFamily="34" charset="-122"/>
+                <a:cs typeface="Times New Roman" pitchFamily="34" charset="-120"/>
+              </a:rPr>
+              <a:t>A wet and a dry season, as in Garoua.</a:t>
+            </a:r>
+            <a:endParaRPr lang="en-US" sz="4000" dirty="0"/>
+          </a:p>
+          <a:p>
+            <a:pPr algn="l" marL="342900" indent="-342900">
+              <a:spcAft>
+                <a:spcPts val="800"/>
+              </a:spcAft>
+              <a:buSzPct val="100000"/>
+              <a:buChar char="•"/>
+            </a:pPr>
+            <a:r>
+              <a:rPr lang="en-US" sz="4000" b="1" dirty="0">
+                <a:solidFill>
+                  <a:srgbClr val="111111"/>
+                </a:solidFill>
+                <a:latin typeface="Times New Roman" pitchFamily="34" charset="0"/>
+                <a:ea typeface="Times New Roman" pitchFamily="34" charset="-122"/>
+                <a:cs typeface="Times New Roman" pitchFamily="34" charset="-120"/>
+              </a:rPr>
+              <a:t>Desert: </a:t>
+            </a:r>
+            <a:pPr algn="l" marL="342900" indent="-342900">
+              <a:spcAft>
+                <a:spcPts val="800"/>
+              </a:spcAft>
+              <a:buSzPct val="100000"/>
+              <a:buChar char="•"/>
+            </a:pPr>
+            <a:r>
+              <a:rPr lang="en-US" sz="4000" dirty="0">
+                <a:solidFill>
+                  <a:srgbClr val="111111"/>
+                </a:solidFill>
+                <a:latin typeface="Times New Roman" pitchFamily="34" charset="0"/>
+                <a:ea typeface="Times New Roman" pitchFamily="34" charset="-122"/>
+                <a:cs typeface="Times New Roman" pitchFamily="34" charset="-120"/>
+              </a:rPr>
+              <a:t>Very dry, in the Sahara and the Kalahari.</a:t>
+            </a:r>
+            <a:endParaRPr lang="en-US" sz="4000" dirty="0"/>
+          </a:p>
+          <a:p>
+            <a:pPr algn="l" marL="342900" indent="-342900">
+              <a:spcAft>
+                <a:spcPts val="800"/>
+              </a:spcAft>
+              <a:buSzPct val="100000"/>
+              <a:buChar char="•"/>
+            </a:pPr>
+            <a:r>
+              <a:rPr lang="en-US" sz="4000" b="1" dirty="0">
+                <a:solidFill>
+                  <a:srgbClr val="111111"/>
+                </a:solidFill>
+                <a:latin typeface="Times New Roman" pitchFamily="34" charset="0"/>
+                <a:ea typeface="Times New Roman" pitchFamily="34" charset="-122"/>
+                <a:cs typeface="Times New Roman" pitchFamily="34" charset="-120"/>
+              </a:rPr>
+              <a:t>Mediterranean: </a:t>
+            </a:r>
+            <a:pPr algn="l" marL="342900" indent="-342900">
+              <a:spcAft>
+                <a:spcPts val="800"/>
+              </a:spcAft>
+              <a:buSzPct val="100000"/>
+              <a:buChar char="•"/>
+            </a:pPr>
+            <a:r>
+              <a:rPr lang="en-US" sz="4000" dirty="0">
+                <a:solidFill>
+                  <a:srgbClr val="111111"/>
+                </a:solidFill>
+                <a:latin typeface="Times New Roman" pitchFamily="34" charset="0"/>
+                <a:ea typeface="Times New Roman" pitchFamily="34" charset="-122"/>
+                <a:cs typeface="Times New Roman" pitchFamily="34" charset="-120"/>
+              </a:rPr>
+              <a:t>Hot, dry summers and wet winters, at the north and south tips.</a:t>
+            </a:r>
+            <a:endParaRPr lang="en-US" sz="4000" dirty="0"/>
           </a:p>
         </p:txBody>
       </p:sp>
@@ -14426,7 +14962,7 @@
                 <a:ea typeface="Times New Roman" pitchFamily="34" charset="-122"/>
                 <a:cs typeface="Times New Roman" pitchFamily="34" charset="-120"/>
               </a:rPr>
-              <a:t>2. Relief</a:t>
+              <a:t>1. Climate (continued)</a:t>
             </a:r>
             <a:endParaRPr lang="en-US" sz="3600" dirty="0"/>
           </a:p>
@@ -14453,14 +14989,15 @@
           <a:bodyPr wrap="square" lIns="0" tIns="0" rIns="0" bIns="0" rtlCol="0" anchor="t"/>
           <a:lstStyle/>
           <a:p>
-            <a:pPr algn="l" indent="0" marL="0">
+            <a:pPr algn="l" marL="342900" indent="-342900">
               <a:spcAft>
                 <a:spcPts val="800"/>
               </a:spcAft>
-              <a:buNone/>
+              <a:buSzPct val="100000"/>
+              <a:buChar char="•"/>
             </a:pPr>
             <a:r>
-              <a:rPr lang="en-US" sz="4000" i="1" dirty="0">
+              <a:rPr lang="en-US" sz="4000" b="1" dirty="0">
                 <a:solidFill>
                   <a:srgbClr val="111111"/>
                 </a:solidFill>
@@ -14468,19 +15005,17 @@
                 <a:ea typeface="Times New Roman" pitchFamily="34" charset="-122"/>
                 <a:cs typeface="Times New Roman" pitchFamily="34" charset="-120"/>
               </a:rPr>
-              <a:t>The relief of Africa has the following features:</a:t>
-            </a:r>
-            <a:endParaRPr lang="en-US" sz="4000" dirty="0"/>
-          </a:p>
-          <a:p>
-            <a:pPr algn="l" indent="0" marL="0">
+              <a:t>Mountain: </a:t>
+            </a:r>
+            <a:pPr algn="l" marL="342900" indent="-342900">
               <a:spcAft>
                 <a:spcPts val="800"/>
               </a:spcAft>
-              <a:buNone/>
+              <a:buSzPct val="100000"/>
+              <a:buChar char="•"/>
             </a:pPr>
             <a:r>
-              <a:rPr lang="en-US" sz="4000" b="1" dirty="0">
+              <a:rPr lang="en-US" sz="4000" dirty="0">
                 <a:solidFill>
                   <a:srgbClr val="111111"/>
                 </a:solidFill>
@@ -14488,61 +15023,7 @@
                 <a:ea typeface="Times New Roman" pitchFamily="34" charset="-122"/>
                 <a:cs typeface="Times New Roman" pitchFamily="34" charset="-120"/>
               </a:rPr>
-              <a:t>Plateaux: </a:t>
-            </a:r>
-            <a:pPr algn="l" indent="0" marL="0">
-              <a:spcAft>
-                <a:spcPts val="800"/>
-              </a:spcAft>
-              <a:buNone/>
-            </a:pPr>
-            <a:r>
-              <a:rPr lang="en-US" sz="4000" dirty="0">
-                <a:solidFill>
-                  <a:srgbClr val="111111"/>
-                </a:solidFill>
-                <a:latin typeface="Times New Roman" pitchFamily="34" charset="0"/>
-                <a:ea typeface="Times New Roman" pitchFamily="34" charset="-122"/>
-                <a:cs typeface="Times New Roman" pitchFamily="34" charset="-120"/>
-              </a:rPr>
-              <a:t>High plateaux cover the south and east of Africa.</a:t>
-            </a:r>
-            <a:endParaRPr lang="en-US" sz="4000" dirty="0"/>
-          </a:p>
-          <a:p>
-            <a:pPr algn="l" indent="0" marL="0">
-              <a:spcAft>
-                <a:spcPts val="800"/>
-              </a:spcAft>
-              <a:buNone/>
-            </a:pPr>
-            <a:r>
-              <a:rPr lang="en-US" sz="4000" b="1" dirty="0">
-                <a:solidFill>
-                  <a:srgbClr val="111111"/>
-                </a:solidFill>
-                <a:latin typeface="Times New Roman" pitchFamily="34" charset="0"/>
-                <a:ea typeface="Times New Roman" pitchFamily="34" charset="-122"/>
-                <a:cs typeface="Times New Roman" pitchFamily="34" charset="-120"/>
-              </a:rPr>
-              <a:t>Basins: </a:t>
-            </a:r>
-            <a:pPr algn="l" indent="0" marL="0">
-              <a:spcAft>
-                <a:spcPts val="800"/>
-              </a:spcAft>
-              <a:buNone/>
-            </a:pPr>
-            <a:r>
-              <a:rPr lang="en-US" sz="4000" dirty="0">
-                <a:solidFill>
-                  <a:srgbClr val="111111"/>
-                </a:solidFill>
-                <a:latin typeface="Times New Roman" pitchFamily="34" charset="0"/>
-                <a:ea typeface="Times New Roman" pitchFamily="34" charset="-122"/>
-                <a:cs typeface="Times New Roman" pitchFamily="34" charset="-120"/>
-              </a:rPr>
-              <a:t>Large basins include the Congo and Chad basins.</a:t>
+              <a:t>Cool, on high land such as the Adamawa and East Africa.</a:t>
             </a:r>
             <a:endParaRPr lang="en-US" sz="4000" dirty="0"/>
           </a:p>
@@ -14719,7 +15200,7 @@
                 <a:ea typeface="Times New Roman" pitchFamily="34" charset="-122"/>
                 <a:cs typeface="Times New Roman" pitchFamily="34" charset="-120"/>
               </a:rPr>
-              <a:t>2. Relief (continued)</a:t>
+              <a:t>2. Relief</a:t>
             </a:r>
             <a:endParaRPr lang="en-US" sz="3600" dirty="0"/>
           </a:p>
@@ -14753,7 +15234,7 @@
               <a:buNone/>
             </a:pPr>
             <a:r>
-              <a:rPr lang="en-US" sz="4000" b="1" dirty="0">
+              <a:rPr lang="en-US" sz="4000" i="1" dirty="0">
                 <a:solidFill>
                   <a:srgbClr val="111111"/>
                 </a:solidFill>
@@ -14761,16 +15242,20 @@
                 <a:ea typeface="Times New Roman" pitchFamily="34" charset="-122"/>
                 <a:cs typeface="Times New Roman" pitchFamily="34" charset="-120"/>
               </a:rPr>
-              <a:t>Mountains: </a:t>
-            </a:r>
-            <a:pPr algn="l" indent="0" marL="0">
+              <a:t>Africa has the following relief features:</a:t>
+            </a:r>
+            <a:endParaRPr lang="en-US" sz="4000" dirty="0"/>
+          </a:p>
+          <a:p>
+            <a:pPr algn="l" marL="342900" indent="-342900">
               <a:spcAft>
                 <a:spcPts val="800"/>
               </a:spcAft>
-              <a:buNone/>
+              <a:buSzPct val="100000"/>
+              <a:buChar char="•"/>
             </a:pPr>
             <a:r>
-              <a:rPr lang="en-US" sz="4000" dirty="0">
+              <a:rPr lang="en-US" sz="4000" b="1" dirty="0">
                 <a:solidFill>
                   <a:srgbClr val="111111"/>
                 </a:solidFill>
@@ -14778,19 +15263,17 @@
                 <a:ea typeface="Times New Roman" pitchFamily="34" charset="-122"/>
                 <a:cs typeface="Times New Roman" pitchFamily="34" charset="-120"/>
               </a:rPr>
-              <a:t>The Atlas are fold mountains and Kilimanjaro is a volcano.</a:t>
-            </a:r>
-            <a:endParaRPr lang="en-US" sz="4000" dirty="0"/>
-          </a:p>
-          <a:p>
-            <a:pPr algn="l" indent="0" marL="0">
+              <a:t>Plateaux: </a:t>
+            </a:r>
+            <a:pPr algn="l" marL="342900" indent="-342900">
               <a:spcAft>
                 <a:spcPts val="800"/>
               </a:spcAft>
-              <a:buNone/>
+              <a:buSzPct val="100000"/>
+              <a:buChar char="•"/>
             </a:pPr>
             <a:r>
-              <a:rPr lang="en-US" sz="4000" b="1" dirty="0">
+              <a:rPr lang="en-US" sz="4000" dirty="0">
                 <a:solidFill>
                   <a:srgbClr val="111111"/>
                 </a:solidFill>
@@ -14798,24 +15281,7 @@
                 <a:ea typeface="Times New Roman" pitchFamily="34" charset="-122"/>
                 <a:cs typeface="Times New Roman" pitchFamily="34" charset="-120"/>
               </a:rPr>
-              <a:t>Rift Valley: </a:t>
-            </a:r>
-            <a:pPr algn="l" indent="0" marL="0">
-              <a:spcAft>
-                <a:spcPts val="800"/>
-              </a:spcAft>
-              <a:buNone/>
-            </a:pPr>
-            <a:r>
-              <a:rPr lang="en-US" sz="4000" dirty="0">
-                <a:solidFill>
-                  <a:srgbClr val="111111"/>
-                </a:solidFill>
-                <a:latin typeface="Times New Roman" pitchFamily="34" charset="0"/>
-                <a:ea typeface="Times New Roman" pitchFamily="34" charset="-122"/>
-                <a:cs typeface="Times New Roman" pitchFamily="34" charset="-120"/>
-              </a:rPr>
-              <a:t>The Great Rift Valley is a long valley in East Africa formed when land sank.</a:t>
+              <a:t>High plateaux cover most of Africa.</a:t>
             </a:r>
             <a:endParaRPr lang="en-US" sz="4000" dirty="0"/>
           </a:p>
@@ -15172,9 +15638,111 @@
           </a:p>
         </p:txBody>
       </p:sp>
+      <p:sp>
+        <p:nvSpPr>
+          <p:cNvPr id="3" name="Text 1"/>
+          <p:cNvSpPr/>
+          <p:nvPr/>
+        </p:nvSpPr>
+        <p:spPr>
+          <a:xfrm>
+            <a:off x="365760" y="1005840"/>
+            <a:ext cx="11460175" cy="731520"/>
+          </a:xfrm>
+          <a:prstGeom prst="rect">
+            <a:avLst/>
+          </a:prstGeom>
+          <a:noFill/>
+          <a:ln/>
+        </p:spPr>
+        <p:txBody>
+          <a:bodyPr wrap="square" lIns="0" tIns="0" rIns="0" bIns="0" rtlCol="0" anchor="ctr">
+            <a:normAutofit/>
+          </a:bodyPr>
+          <a:lstStyle/>
+          <a:p>
+            <a:pPr algn="ctr" indent="0" marL="0">
+              <a:buNone/>
+            </a:pPr>
+            <a:r>
+              <a:rPr lang="en-US" sz="3600" b="1" dirty="0">
+                <a:solidFill>
+                  <a:srgbClr val="990011"/>
+                </a:solidFill>
+                <a:latin typeface="Times New Roman" pitchFamily="34" charset="0"/>
+                <a:ea typeface="Times New Roman" pitchFamily="34" charset="-122"/>
+                <a:cs typeface="Times New Roman" pitchFamily="34" charset="-120"/>
+              </a:rPr>
+              <a:t>2. Relief</a:t>
+            </a:r>
+            <a:endParaRPr lang="en-US" sz="3600" dirty="0"/>
+          </a:p>
+        </p:txBody>
+      </p:sp>
+      <p:sp>
+        <p:nvSpPr>
+          <p:cNvPr id="4" name="Text 2"/>
+          <p:cNvSpPr/>
+          <p:nvPr/>
+        </p:nvSpPr>
+        <p:spPr>
+          <a:xfrm>
+            <a:off x="365760" y="1783080"/>
+            <a:ext cx="4846320" cy="4617720"/>
+          </a:xfrm>
+          <a:prstGeom prst="rect">
+            <a:avLst/>
+          </a:prstGeom>
+          <a:noFill/>
+          <a:ln/>
+        </p:spPr>
+        <p:txBody>
+          <a:bodyPr wrap="square" lIns="0" tIns="0" rIns="0" bIns="0" rtlCol="0" anchor="t"/>
+          <a:lstStyle/>
+          <a:p>
+            <a:pPr algn="l" marL="342900" indent="-342900">
+              <a:spcAft>
+                <a:spcPts val="800"/>
+              </a:spcAft>
+              <a:buSzPct val="100000"/>
+              <a:buChar char="•"/>
+            </a:pPr>
+            <a:r>
+              <a:rPr lang="en-US" sz="3600" b="1" dirty="0">
+                <a:solidFill>
+                  <a:srgbClr val="111111"/>
+                </a:solidFill>
+                <a:latin typeface="Times New Roman" pitchFamily="34" charset="0"/>
+                <a:ea typeface="Times New Roman" pitchFamily="34" charset="-122"/>
+                <a:cs typeface="Times New Roman" pitchFamily="34" charset="-120"/>
+              </a:rPr>
+              <a:t>Fold mountains: </a:t>
+            </a:r>
+            <a:pPr algn="l" marL="342900" indent="-342900">
+              <a:spcAft>
+                <a:spcPts val="800"/>
+              </a:spcAft>
+              <a:buSzPct val="100000"/>
+              <a:buChar char="•"/>
+            </a:pPr>
+            <a:r>
+              <a:rPr lang="en-US" sz="3600" dirty="0">
+                <a:solidFill>
+                  <a:srgbClr val="111111"/>
+                </a:solidFill>
+                <a:latin typeface="Times New Roman" pitchFamily="34" charset="0"/>
+                <a:ea typeface="Times New Roman" pitchFamily="34" charset="-122"/>
+                <a:cs typeface="Times New Roman" pitchFamily="34" charset="-120"/>
+              </a:rPr>
+              <a:t>The Atlas in the north and the Cape Ranges in the south.</a:t>
+            </a:r>
+            <a:endParaRPr lang="en-US" sz="3600" dirty="0"/>
+          </a:p>
+        </p:txBody>
+      </p:sp>
       <p:pic>
         <p:nvPicPr>
-          <p:cNvPr id="3" name="Image 0" descr="/home/claude/f4/img/minesec_sheet.png">    </p:cNvPr>
+          <p:cNvPr id="5" name="Image 0" descr="/home/claude/f4/img/v2/f2t_atlas.jpg">    </p:cNvPr>
           <p:cNvPicPr>
             <a:picLocks noChangeAspect="1"/>
           </p:cNvPicPr>
@@ -15188,8 +15756,8 @@
         </p:blipFill>
         <p:spPr>
           <a:xfrm>
-            <a:off x="0" y="658368"/>
-            <a:ext cx="5120640" cy="5833872"/>
+            <a:off x="5349240" y="2136247"/>
+            <a:ext cx="6659575" cy="3563913"/>
           </a:xfrm>
           <a:prstGeom prst="rect">
             <a:avLst/>
@@ -15198,14 +15766,14 @@
       </p:pic>
       <p:sp>
         <p:nvSpPr>
-          <p:cNvPr id="4" name="Text 1"/>
+          <p:cNvPr id="6" name="Text 3"/>
           <p:cNvSpPr/>
           <p:nvPr/>
         </p:nvSpPr>
         <p:spPr>
           <a:xfrm>
-            <a:off x="5349240" y="1005840"/>
-            <a:ext cx="6522415" cy="731520"/>
+            <a:off x="5349240" y="6089904"/>
+            <a:ext cx="6659575" cy="347472"/>
           </a:xfrm>
           <a:prstGeom prst="rect">
             <a:avLst/>
@@ -15214,142 +15782,24 @@
           <a:ln/>
         </p:spPr>
         <p:txBody>
-          <a:bodyPr wrap="square" lIns="0" tIns="0" rIns="0" bIns="0" rtlCol="0" anchor="ctr">
-            <a:normAutofit/>
-          </a:bodyPr>
+          <a:bodyPr wrap="square" lIns="0" tIns="0" rIns="0" bIns="0" rtlCol="0" anchor="ctr"/>
           <a:lstStyle/>
           <a:p>
             <a:pPr algn="ctr" indent="0" marL="0">
               <a:buNone/>
             </a:pPr>
             <a:r>
-              <a:rPr lang="en-US" sz="3600" b="1" dirty="0">
-                <a:solidFill>
-                  <a:srgbClr val="990011"/>
+              <a:rPr lang="en-US" sz="1600" i="1" dirty="0">
+                <a:solidFill>
+                  <a:srgbClr val="555555"/>
                 </a:solidFill>
                 <a:latin typeface="Times New Roman" pitchFamily="34" charset="0"/>
                 <a:ea typeface="Times New Roman" pitchFamily="34" charset="-122"/>
                 <a:cs typeface="Times New Roman" pitchFamily="34" charset="-120"/>
               </a:rPr>
-              <a:t>3. Soils</a:t>
-            </a:r>
-            <a:endParaRPr lang="en-US" sz="3600" dirty="0"/>
-          </a:p>
-        </p:txBody>
-      </p:sp>
-      <p:sp>
-        <p:nvSpPr>
-          <p:cNvPr id="5" name="Text 2"/>
-          <p:cNvSpPr/>
-          <p:nvPr/>
-        </p:nvSpPr>
-        <p:spPr>
-          <a:xfrm>
-            <a:off x="5349240" y="1783080"/>
-            <a:ext cx="6522415" cy="4663440"/>
-          </a:xfrm>
-          <a:prstGeom prst="rect">
-            <a:avLst/>
-          </a:prstGeom>
-          <a:noFill/>
-          <a:ln/>
-        </p:spPr>
-        <p:txBody>
-          <a:bodyPr wrap="square" lIns="0" tIns="0" rIns="0" bIns="0" rtlCol="0" anchor="t"/>
-          <a:lstStyle/>
-          <a:p>
-            <a:pPr algn="l" indent="0" marL="0">
-              <a:spcAft>
-                <a:spcPts val="800"/>
-              </a:spcAft>
-              <a:buNone/>
-            </a:pPr>
-            <a:r>
-              <a:rPr lang="en-US" sz="4000" i="1" dirty="0">
-                <a:solidFill>
-                  <a:srgbClr val="111111"/>
-                </a:solidFill>
-                <a:latin typeface="Times New Roman" pitchFamily="34" charset="0"/>
-                <a:ea typeface="Times New Roman" pitchFamily="34" charset="-122"/>
-                <a:cs typeface="Times New Roman" pitchFamily="34" charset="-120"/>
-              </a:rPr>
-              <a:t>Africa has the following main types of soils:</a:t>
-            </a:r>
-            <a:endParaRPr lang="en-US" sz="4000" dirty="0"/>
-          </a:p>
-          <a:p>
-            <a:pPr algn="l" indent="0" marL="0">
-              <a:spcAft>
-                <a:spcPts val="800"/>
-              </a:spcAft>
-              <a:buNone/>
-            </a:pPr>
-            <a:r>
-              <a:rPr lang="en-US" sz="4000" b="1" dirty="0">
-                <a:solidFill>
-                  <a:srgbClr val="111111"/>
-                </a:solidFill>
-                <a:latin typeface="Times New Roman" pitchFamily="34" charset="0"/>
-                <a:ea typeface="Times New Roman" pitchFamily="34" charset="-122"/>
-                <a:cs typeface="Times New Roman" pitchFamily="34" charset="-120"/>
-              </a:rPr>
-              <a:t>Red soils: </a:t>
-            </a:r>
-            <a:pPr algn="l" indent="0" marL="0">
-              <a:spcAft>
-                <a:spcPts val="800"/>
-              </a:spcAft>
-              <a:buNone/>
-            </a:pPr>
-            <a:r>
-              <a:rPr lang="en-US" sz="4000" dirty="0">
-                <a:solidFill>
-                  <a:srgbClr val="111111"/>
-                </a:solidFill>
-                <a:latin typeface="Times New Roman" pitchFamily="34" charset="0"/>
-                <a:ea typeface="Times New Roman" pitchFamily="34" charset="-122"/>
-                <a:cs typeface="Times New Roman" pitchFamily="34" charset="-120"/>
-              </a:rPr>
-              <a:t>Red soils are found in the forest and savanna regions.</a:t>
-            </a:r>
-            <a:endParaRPr lang="en-US" sz="4000" dirty="0"/>
-          </a:p>
-          <a:p>
-            <a:pPr algn="l" indent="0" marL="0">
-              <a:spcAft>
-                <a:spcPts val="800"/>
-              </a:spcAft>
-              <a:buNone/>
-            </a:pPr>
-            <a:r>
-              <a:rPr lang="en-US" sz="4000" b="1" dirty="0">
-                <a:solidFill>
-                  <a:srgbClr val="111111"/>
-                </a:solidFill>
-                <a:latin typeface="Times New Roman" pitchFamily="34" charset="0"/>
-                <a:ea typeface="Times New Roman" pitchFamily="34" charset="-122"/>
-                <a:cs typeface="Times New Roman" pitchFamily="34" charset="-120"/>
-              </a:rPr>
-              <a:t>Desert soils: </a:t>
-            </a:r>
-            <a:pPr algn="l" indent="0" marL="0">
-              <a:spcAft>
-                <a:spcPts val="800"/>
-              </a:spcAft>
-              <a:buNone/>
-            </a:pPr>
-            <a:r>
-              <a:rPr lang="en-US" sz="4000" dirty="0">
-                <a:solidFill>
-                  <a:srgbClr val="111111"/>
-                </a:solidFill>
-                <a:latin typeface="Times New Roman" pitchFamily="34" charset="0"/>
-                <a:ea typeface="Times New Roman" pitchFamily="34" charset="-122"/>
-                <a:cs typeface="Times New Roman" pitchFamily="34" charset="-120"/>
-              </a:rPr>
-              <a:t>Desert soils are sandy and poor.</a:t>
-            </a:r>
-            <a:endParaRPr lang="en-US" sz="4000" dirty="0"/>
+              <a:t>Illustration: the Atlas Mountains</a:t>
+            </a:r>
+            <a:endParaRPr lang="en-US" sz="1600" dirty="0"/>
           </a:p>
         </p:txBody>
       </p:sp>
@@ -15524,7 +15974,7 @@
                 <a:ea typeface="Times New Roman" pitchFamily="34" charset="-122"/>
                 <a:cs typeface="Times New Roman" pitchFamily="34" charset="-120"/>
               </a:rPr>
-              <a:t>3. Soils (continued)</a:t>
+              <a:t>2. Relief</a:t>
             </a:r>
             <a:endParaRPr lang="en-US" sz="3600" dirty="0"/>
           </a:p>
@@ -15551,11 +16001,12 @@
           <a:bodyPr wrap="square" lIns="0" tIns="0" rIns="0" bIns="0" rtlCol="0" anchor="t"/>
           <a:lstStyle/>
           <a:p>
-            <a:pPr algn="l" indent="0" marL="0">
+            <a:pPr algn="l" marL="342900" indent="-342900">
               <a:spcAft>
                 <a:spcPts val="800"/>
               </a:spcAft>
-              <a:buNone/>
+              <a:buSzPct val="100000"/>
+              <a:buChar char="•"/>
             </a:pPr>
             <a:r>
               <a:rPr lang="en-US" sz="4000" b="1" dirty="0">
@@ -15566,13 +16017,14 @@
                 <a:ea typeface="Times New Roman" pitchFamily="34" charset="-122"/>
                 <a:cs typeface="Times New Roman" pitchFamily="34" charset="-120"/>
               </a:rPr>
-              <a:t>Volcanic soils: </a:t>
-            </a:r>
-            <a:pPr algn="l" indent="0" marL="0">
+              <a:t>Volcanic mountains: </a:t>
+            </a:r>
+            <a:pPr algn="l" marL="342900" indent="-342900">
               <a:spcAft>
                 <a:spcPts val="800"/>
               </a:spcAft>
-              <a:buNone/>
+              <a:buSzPct val="100000"/>
+              <a:buChar char="•"/>
             </a:pPr>
             <a:r>
               <a:rPr lang="en-US" sz="4000" dirty="0">
@@ -15583,7 +16035,7 @@
                 <a:ea typeface="Times New Roman" pitchFamily="34" charset="-122"/>
                 <a:cs typeface="Times New Roman" pitchFamily="34" charset="-120"/>
               </a:rPr>
-              <a:t>Volcanic soils are very fertile, as around Mount Cameroon.</a:t>
+              <a:t>Kilimanjaro and Mount Cameroon.</a:t>
             </a:r>
             <a:endParaRPr lang="en-US" sz="4000" dirty="0"/>
           </a:p>
@@ -15695,15 +16147,117 @@
                 <a:ea typeface="Calibri" pitchFamily="34" charset="-122"/>
                 <a:cs typeface="Calibri" pitchFamily="34" charset="-120"/>
               </a:rPr>
-              <a:t>FORMATIVE EVALUATION</a:t>
+              <a:t>BOARD SUMMARY</a:t>
             </a:r>
             <a:endParaRPr lang="en-US" sz="1400" dirty="0"/>
+          </a:p>
+        </p:txBody>
+      </p:sp>
+      <p:sp>
+        <p:nvSpPr>
+          <p:cNvPr id="3" name="Text 1"/>
+          <p:cNvSpPr/>
+          <p:nvPr/>
+        </p:nvSpPr>
+        <p:spPr>
+          <a:xfrm>
+            <a:off x="365760" y="1005840"/>
+            <a:ext cx="11460175" cy="731520"/>
+          </a:xfrm>
+          <a:prstGeom prst="rect">
+            <a:avLst/>
+          </a:prstGeom>
+          <a:noFill/>
+          <a:ln/>
+        </p:spPr>
+        <p:txBody>
+          <a:bodyPr wrap="square" lIns="0" tIns="0" rIns="0" bIns="0" rtlCol="0" anchor="ctr">
+            <a:normAutofit/>
+          </a:bodyPr>
+          <a:lstStyle/>
+          <a:p>
+            <a:pPr algn="ctr" indent="0" marL="0">
+              <a:buNone/>
+            </a:pPr>
+            <a:r>
+              <a:rPr lang="en-US" sz="3600" b="1" dirty="0">
+                <a:solidFill>
+                  <a:srgbClr val="990011"/>
+                </a:solidFill>
+                <a:latin typeface="Times New Roman" pitchFamily="34" charset="0"/>
+                <a:ea typeface="Times New Roman" pitchFamily="34" charset="-122"/>
+                <a:cs typeface="Times New Roman" pitchFamily="34" charset="-120"/>
+              </a:rPr>
+              <a:t>2. Relief</a:t>
+            </a:r>
+            <a:endParaRPr lang="en-US" sz="3600" dirty="0"/>
+          </a:p>
+        </p:txBody>
+      </p:sp>
+      <p:sp>
+        <p:nvSpPr>
+          <p:cNvPr id="4" name="Text 2"/>
+          <p:cNvSpPr/>
+          <p:nvPr/>
+        </p:nvSpPr>
+        <p:spPr>
+          <a:xfrm>
+            <a:off x="365760" y="1783080"/>
+            <a:ext cx="4846320" cy="4617720"/>
+          </a:xfrm>
+          <a:prstGeom prst="rect">
+            <a:avLst/>
+          </a:prstGeom>
+          <a:noFill/>
+          <a:ln/>
+        </p:spPr>
+        <p:txBody>
+          <a:bodyPr wrap="square" lIns="0" tIns="0" rIns="0" bIns="0" rtlCol="0" anchor="t"/>
+          <a:lstStyle/>
+          <a:p>
+            <a:pPr algn="l" marL="342900" indent="-342900">
+              <a:spcAft>
+                <a:spcPts val="800"/>
+              </a:spcAft>
+              <a:buSzPct val="100000"/>
+              <a:buChar char="•"/>
+            </a:pPr>
+            <a:r>
+              <a:rPr lang="en-US" sz="3600" b="1" dirty="0">
+                <a:solidFill>
+                  <a:srgbClr val="111111"/>
+                </a:solidFill>
+                <a:latin typeface="Times New Roman" pitchFamily="34" charset="0"/>
+                <a:ea typeface="Times New Roman" pitchFamily="34" charset="-122"/>
+                <a:cs typeface="Times New Roman" pitchFamily="34" charset="-120"/>
+              </a:rPr>
+              <a:t>Rift Valley: </a:t>
+            </a:r>
+            <a:pPr algn="l" marL="342900" indent="-342900">
+              <a:spcAft>
+                <a:spcPts val="800"/>
+              </a:spcAft>
+              <a:buSzPct val="100000"/>
+              <a:buChar char="•"/>
+            </a:pPr>
+            <a:r>
+              <a:rPr lang="en-US" sz="3600" dirty="0">
+                <a:solidFill>
+                  <a:srgbClr val="111111"/>
+                </a:solidFill>
+                <a:latin typeface="Times New Roman" pitchFamily="34" charset="0"/>
+                <a:ea typeface="Times New Roman" pitchFamily="34" charset="-122"/>
+                <a:cs typeface="Times New Roman" pitchFamily="34" charset="-120"/>
+              </a:rPr>
+              <a:t>A long valley from the Red Sea to Mozambique.</a:t>
+            </a:r>
+            <a:endParaRPr lang="en-US" sz="3600" dirty="0"/>
           </a:p>
         </p:txBody>
       </p:sp>
       <p:pic>
         <p:nvPicPr>
-          <p:cNvPr id="3" name="Image 0" descr="/home/claude/f4/img/minesec_sheet.png">    </p:cNvPr>
+          <p:cNvPr id="5" name="Image 0" descr="/home/claude/f4/img/v2/f2t_rift_valley.jpg">    </p:cNvPr>
           <p:cNvPicPr>
             <a:picLocks noChangeAspect="1"/>
           </p:cNvPicPr>
@@ -15717,8 +16271,8 @@
         </p:blipFill>
         <p:spPr>
           <a:xfrm>
-            <a:off x="0" y="658368"/>
-            <a:ext cx="5120640" cy="5833872"/>
+            <a:off x="5349240" y="2071212"/>
+            <a:ext cx="6659575" cy="3693983"/>
           </a:xfrm>
           <a:prstGeom prst="rect">
             <a:avLst/>
@@ -15727,14 +16281,14 @@
       </p:pic>
       <p:sp>
         <p:nvSpPr>
-          <p:cNvPr id="4" name="Text 1"/>
+          <p:cNvPr id="6" name="Text 3"/>
           <p:cNvSpPr/>
           <p:nvPr/>
         </p:nvSpPr>
         <p:spPr>
           <a:xfrm>
-            <a:off x="5349240" y="1005840"/>
-            <a:ext cx="6522415" cy="731520"/>
+            <a:off x="5349240" y="6089904"/>
+            <a:ext cx="6659575" cy="347472"/>
           </a:xfrm>
           <a:prstGeom prst="rect">
             <a:avLst/>
@@ -15743,68 +16297,24 @@
           <a:ln/>
         </p:spPr>
         <p:txBody>
-          <a:bodyPr wrap="square" lIns="0" tIns="0" rIns="0" bIns="0" rtlCol="0" anchor="ctr">
-            <a:normAutofit/>
-          </a:bodyPr>
+          <a:bodyPr wrap="square" lIns="0" tIns="0" rIns="0" bIns="0" rtlCol="0" anchor="ctr"/>
           <a:lstStyle/>
           <a:p>
             <a:pPr algn="ctr" indent="0" marL="0">
               <a:buNone/>
             </a:pPr>
             <a:r>
-              <a:rPr lang="en-US" sz="3600" b="1" dirty="0">
-                <a:solidFill>
-                  <a:srgbClr val="990011"/>
+              <a:rPr lang="en-US" sz="1600" i="1" dirty="0">
+                <a:solidFill>
+                  <a:srgbClr val="555555"/>
                 </a:solidFill>
                 <a:latin typeface="Times New Roman" pitchFamily="34" charset="0"/>
                 <a:ea typeface="Times New Roman" pitchFamily="34" charset="-122"/>
                 <a:cs typeface="Times New Roman" pitchFamily="34" charset="-120"/>
               </a:rPr>
-              <a:t>Evaluation 1</a:t>
-            </a:r>
-            <a:endParaRPr lang="en-US" sz="3600" dirty="0"/>
-          </a:p>
-        </p:txBody>
-      </p:sp>
-      <p:sp>
-        <p:nvSpPr>
-          <p:cNvPr id="5" name="Text 2"/>
-          <p:cNvSpPr/>
-          <p:nvPr/>
-        </p:nvSpPr>
-        <p:spPr>
-          <a:xfrm>
-            <a:off x="5349240" y="1783080"/>
-            <a:ext cx="6522415" cy="4663440"/>
-          </a:xfrm>
-          <a:prstGeom prst="rect">
-            <a:avLst/>
-          </a:prstGeom>
-          <a:noFill/>
-          <a:ln/>
-        </p:spPr>
-        <p:txBody>
-          <a:bodyPr wrap="square" lIns="0" tIns="0" rIns="0" bIns="0" rtlCol="0" anchor="t"/>
-          <a:lstStyle/>
-          <a:p>
-            <a:pPr algn="l" indent="0" marL="0">
-              <a:spcAft>
-                <a:spcPts val="800"/>
-              </a:spcAft>
-              <a:buNone/>
-            </a:pPr>
-            <a:r>
-              <a:rPr lang="en-US" sz="4000" dirty="0">
-                <a:solidFill>
-                  <a:srgbClr val="111111"/>
-                </a:solidFill>
-                <a:latin typeface="Times New Roman" pitchFamily="34" charset="0"/>
-                <a:ea typeface="Times New Roman" pitchFamily="34" charset="-122"/>
-                <a:cs typeface="Times New Roman" pitchFamily="34" charset="-120"/>
-              </a:rPr>
-              <a:t>Why is Nairobi cool though it is near the Equator?</a:t>
-            </a:r>
-            <a:endParaRPr lang="en-US" sz="4000" dirty="0"/>
+              <a:t>Illustration: the Rift Valley</a:t>
+            </a:r>
+            <a:endParaRPr lang="en-US" sz="1600" dirty="0"/>
           </a:p>
         </p:txBody>
       </p:sp>
@@ -15914,7 +16424,7 @@
                 <a:ea typeface="Calibri" pitchFamily="34" charset="-122"/>
                 <a:cs typeface="Calibri" pitchFamily="34" charset="-120"/>
               </a:rPr>
-              <a:t>FORMATIVE EVALUATION</a:t>
+              <a:t>BOARD SUMMARY</a:t>
             </a:r>
             <a:endParaRPr lang="en-US" sz="1400" dirty="0"/>
           </a:p>
@@ -15979,7 +16489,7 @@
                 <a:ea typeface="Times New Roman" pitchFamily="34" charset="-122"/>
                 <a:cs typeface="Times New Roman" pitchFamily="34" charset="-120"/>
               </a:rPr>
-              <a:t>Expected Answer</a:t>
+              <a:t>2. Relief</a:t>
             </a:r>
             <a:endParaRPr lang="en-US" sz="3600" dirty="0"/>
           </a:p>
@@ -16006,14 +16516,15 @@
           <a:bodyPr wrap="square" lIns="0" tIns="0" rIns="0" bIns="0" rtlCol="0" anchor="t"/>
           <a:lstStyle/>
           <a:p>
-            <a:pPr algn="l" indent="0" marL="0">
+            <a:pPr algn="l" marL="342900" indent="-342900">
               <a:spcAft>
                 <a:spcPts val="800"/>
               </a:spcAft>
-              <a:buNone/>
+              <a:buSzPct val="100000"/>
+              <a:buChar char="•"/>
             </a:pPr>
             <a:r>
-              <a:rPr lang="en-US" sz="4000" dirty="0">
+              <a:rPr lang="en-US" sz="4000" b="1" dirty="0">
                 <a:solidFill>
                   <a:srgbClr val="111111"/>
                 </a:solidFill>
@@ -16021,7 +16532,25 @@
                 <a:ea typeface="Times New Roman" pitchFamily="34" charset="-122"/>
                 <a:cs typeface="Times New Roman" pitchFamily="34" charset="-120"/>
               </a:rPr>
-              <a:t>Because it is high.</a:t>
+              <a:t>Basins: </a:t>
+            </a:r>
+            <a:pPr algn="l" marL="342900" indent="-342900">
+              <a:spcAft>
+                <a:spcPts val="800"/>
+              </a:spcAft>
+              <a:buSzPct val="100000"/>
+              <a:buChar char="•"/>
+            </a:pPr>
+            <a:r>
+              <a:rPr lang="en-US" sz="4000" dirty="0">
+                <a:solidFill>
+                  <a:srgbClr val="111111"/>
+                </a:solidFill>
+                <a:latin typeface="Times New Roman" pitchFamily="34" charset="0"/>
+                <a:ea typeface="Times New Roman" pitchFamily="34" charset="-122"/>
+                <a:cs typeface="Times New Roman" pitchFamily="34" charset="-120"/>
+              </a:rPr>
+              <a:t>The Congo, Chad and Kalahari basins.</a:t>
             </a:r>
             <a:endParaRPr lang="en-US" sz="4000" dirty="0"/>
           </a:p>
@@ -16133,7 +16662,7 @@
                 <a:ea typeface="Calibri" pitchFamily="34" charset="-122"/>
                 <a:cs typeface="Calibri" pitchFamily="34" charset="-120"/>
               </a:rPr>
-              <a:t>FORMATIVE EVALUATION</a:t>
+              <a:t>BOARD SUMMARY</a:t>
             </a:r>
             <a:endParaRPr lang="en-US" sz="1400" dirty="0"/>
           </a:p>
@@ -16156,7 +16685,7 @@
         <p:spPr>
           <a:xfrm>
             <a:off x="0" y="658368"/>
-            <a:ext cx="5120640" cy="5833872"/>
+            <a:ext cx="1463040" cy="5833872"/>
           </a:xfrm>
           <a:prstGeom prst="rect">
             <a:avLst/>
@@ -16171,8 +16700,8 @@
         </p:nvSpPr>
         <p:spPr>
           <a:xfrm>
-            <a:off x="5349240" y="1005840"/>
-            <a:ext cx="6522415" cy="731520"/>
+            <a:off x="1691640" y="1005840"/>
+            <a:ext cx="10180015" cy="731520"/>
           </a:xfrm>
           <a:prstGeom prst="rect">
             <a:avLst/>
@@ -16198,7 +16727,7 @@
                 <a:ea typeface="Times New Roman" pitchFamily="34" charset="-122"/>
                 <a:cs typeface="Times New Roman" pitchFamily="34" charset="-120"/>
               </a:rPr>
-              <a:t>Evaluation 2</a:t>
+              <a:t>3. Soils</a:t>
             </a:r>
             <a:endParaRPr lang="en-US" sz="3600" dirty="0"/>
           </a:p>
@@ -16212,8 +16741,8 @@
         </p:nvSpPr>
         <p:spPr>
           <a:xfrm>
-            <a:off x="5349240" y="1783080"/>
-            <a:ext cx="6522415" cy="4663440"/>
+            <a:off x="1691640" y="1783080"/>
+            <a:ext cx="10180015" cy="4663440"/>
           </a:xfrm>
           <a:prstGeom prst="rect">
             <a:avLst/>
@@ -16232,7 +16761,7 @@
               <a:buNone/>
             </a:pPr>
             <a:r>
-              <a:rPr lang="en-US" sz="4000" dirty="0">
+              <a:rPr lang="en-US" sz="4000" i="1" dirty="0">
                 <a:solidFill>
                   <a:srgbClr val="111111"/>
                 </a:solidFill>
@@ -16240,7 +16769,124 @@
                 <a:ea typeface="Times New Roman" pitchFamily="34" charset="-122"/>
                 <a:cs typeface="Times New Roman" pitchFamily="34" charset="-120"/>
               </a:rPr>
-              <a:t>Why are the soils of Mount Cameroon fertile?</a:t>
+              <a:t>Africa has the following main soils:</a:t>
+            </a:r>
+            <a:endParaRPr lang="en-US" sz="4000" dirty="0"/>
+          </a:p>
+          <a:p>
+            <a:pPr algn="l" marL="342900" indent="-342900">
+              <a:spcAft>
+                <a:spcPts val="800"/>
+              </a:spcAft>
+              <a:buSzPct val="100000"/>
+              <a:buChar char="•"/>
+            </a:pPr>
+            <a:r>
+              <a:rPr lang="en-US" sz="4000" b="1" dirty="0">
+                <a:solidFill>
+                  <a:srgbClr val="111111"/>
+                </a:solidFill>
+                <a:latin typeface="Times New Roman" pitchFamily="34" charset="0"/>
+                <a:ea typeface="Times New Roman" pitchFamily="34" charset="-122"/>
+                <a:cs typeface="Times New Roman" pitchFamily="34" charset="-120"/>
+              </a:rPr>
+              <a:t>Ferrallitic soils: </a:t>
+            </a:r>
+            <a:pPr algn="l" marL="342900" indent="-342900">
+              <a:spcAft>
+                <a:spcPts val="800"/>
+              </a:spcAft>
+              <a:buSzPct val="100000"/>
+              <a:buChar char="•"/>
+            </a:pPr>
+            <a:r>
+              <a:rPr lang="en-US" sz="4000" dirty="0">
+                <a:solidFill>
+                  <a:srgbClr val="111111"/>
+                </a:solidFill>
+                <a:latin typeface="Times New Roman" pitchFamily="34" charset="0"/>
+                <a:ea typeface="Times New Roman" pitchFamily="34" charset="-122"/>
+                <a:cs typeface="Times New Roman" pitchFamily="34" charset="-120"/>
+              </a:rPr>
+              <a:t>Red, leached soils in the forest.</a:t>
+            </a:r>
+            <a:endParaRPr lang="en-US" sz="4000" dirty="0"/>
+          </a:p>
+          <a:p>
+            <a:pPr algn="l" marL="342900" indent="-342900">
+              <a:spcAft>
+                <a:spcPts val="800"/>
+              </a:spcAft>
+              <a:buSzPct val="100000"/>
+              <a:buChar char="•"/>
+            </a:pPr>
+            <a:r>
+              <a:rPr lang="en-US" sz="4000" b="1" dirty="0">
+                <a:solidFill>
+                  <a:srgbClr val="111111"/>
+                </a:solidFill>
+                <a:latin typeface="Times New Roman" pitchFamily="34" charset="0"/>
+                <a:ea typeface="Times New Roman" pitchFamily="34" charset="-122"/>
+                <a:cs typeface="Times New Roman" pitchFamily="34" charset="-120"/>
+              </a:rPr>
+              <a:t>Ferruginous soils: </a:t>
+            </a:r>
+            <a:pPr algn="l" marL="342900" indent="-342900">
+              <a:spcAft>
+                <a:spcPts val="800"/>
+              </a:spcAft>
+              <a:buSzPct val="100000"/>
+              <a:buChar char="•"/>
+            </a:pPr>
+            <a:r>
+              <a:rPr lang="en-US" sz="4000" dirty="0">
+                <a:solidFill>
+                  <a:srgbClr val="111111"/>
+                </a:solidFill>
+                <a:latin typeface="Times New Roman" pitchFamily="34" charset="0"/>
+                <a:ea typeface="Times New Roman" pitchFamily="34" charset="-122"/>
+                <a:cs typeface="Times New Roman" pitchFamily="34" charset="-120"/>
+              </a:rPr>
+              <a:t>Red soils of the savanna.</a:t>
+            </a:r>
+            <a:endParaRPr lang="en-US" sz="4000" dirty="0"/>
+          </a:p>
+          <a:p>
+            <a:pPr algn="l" marL="342900" indent="-342900">
+              <a:spcAft>
+                <a:spcPts val="800"/>
+              </a:spcAft>
+              <a:buSzPct val="100000"/>
+              <a:buChar char="•"/>
+            </a:pPr>
+            <a:r>
+              <a:rPr lang="en-US" sz="4000" b="1" dirty="0">
+                <a:solidFill>
+                  <a:srgbClr val="111111"/>
+                </a:solidFill>
+                <a:latin typeface="Times New Roman" pitchFamily="34" charset="0"/>
+                <a:ea typeface="Times New Roman" pitchFamily="34" charset="-122"/>
+                <a:cs typeface="Times New Roman" pitchFamily="34" charset="-120"/>
+              </a:rPr>
+              <a:t>Desert soils: </a:t>
+            </a:r>
+            <a:pPr algn="l" marL="342900" indent="-342900">
+              <a:spcAft>
+                <a:spcPts val="800"/>
+              </a:spcAft>
+              <a:buSzPct val="100000"/>
+              <a:buChar char="•"/>
+            </a:pPr>
+            <a:r>
+              <a:rPr lang="en-US" sz="4000" dirty="0">
+                <a:solidFill>
+                  <a:srgbClr val="111111"/>
+                </a:solidFill>
+                <a:latin typeface="Times New Roman" pitchFamily="34" charset="0"/>
+                <a:ea typeface="Times New Roman" pitchFamily="34" charset="-122"/>
+                <a:cs typeface="Times New Roman" pitchFamily="34" charset="-120"/>
+              </a:rPr>
+              <a:t>Sandy, stony and poor soils.</a:t>
             </a:r>
             <a:endParaRPr lang="en-US" sz="4000" dirty="0"/>
           </a:p>
@@ -16352,15 +16998,117 @@
                 <a:ea typeface="Calibri" pitchFamily="34" charset="-122"/>
                 <a:cs typeface="Calibri" pitchFamily="34" charset="-120"/>
               </a:rPr>
-              <a:t>FORMATIVE EVALUATION</a:t>
+              <a:t>BOARD SUMMARY</a:t>
             </a:r>
             <a:endParaRPr lang="en-US" sz="1400" dirty="0"/>
+          </a:p>
+        </p:txBody>
+      </p:sp>
+      <p:sp>
+        <p:nvSpPr>
+          <p:cNvPr id="3" name="Text 1"/>
+          <p:cNvSpPr/>
+          <p:nvPr/>
+        </p:nvSpPr>
+        <p:spPr>
+          <a:xfrm>
+            <a:off x="365760" y="1005840"/>
+            <a:ext cx="11460175" cy="731520"/>
+          </a:xfrm>
+          <a:prstGeom prst="rect">
+            <a:avLst/>
+          </a:prstGeom>
+          <a:noFill/>
+          <a:ln/>
+        </p:spPr>
+        <p:txBody>
+          <a:bodyPr wrap="square" lIns="0" tIns="0" rIns="0" bIns="0" rtlCol="0" anchor="ctr">
+            <a:normAutofit/>
+          </a:bodyPr>
+          <a:lstStyle/>
+          <a:p>
+            <a:pPr algn="ctr" indent="0" marL="0">
+              <a:buNone/>
+            </a:pPr>
+            <a:r>
+              <a:rPr lang="en-US" sz="3600" b="1" dirty="0">
+                <a:solidFill>
+                  <a:srgbClr val="990011"/>
+                </a:solidFill>
+                <a:latin typeface="Times New Roman" pitchFamily="34" charset="0"/>
+                <a:ea typeface="Times New Roman" pitchFamily="34" charset="-122"/>
+                <a:cs typeface="Times New Roman" pitchFamily="34" charset="-120"/>
+              </a:rPr>
+              <a:t>3. Soils</a:t>
+            </a:r>
+            <a:endParaRPr lang="en-US" sz="3600" dirty="0"/>
+          </a:p>
+        </p:txBody>
+      </p:sp>
+      <p:sp>
+        <p:nvSpPr>
+          <p:cNvPr id="4" name="Text 2"/>
+          <p:cNvSpPr/>
+          <p:nvPr/>
+        </p:nvSpPr>
+        <p:spPr>
+          <a:xfrm>
+            <a:off x="365760" y="1783080"/>
+            <a:ext cx="4846320" cy="4617720"/>
+          </a:xfrm>
+          <a:prstGeom prst="rect">
+            <a:avLst/>
+          </a:prstGeom>
+          <a:noFill/>
+          <a:ln/>
+        </p:spPr>
+        <p:txBody>
+          <a:bodyPr wrap="square" lIns="0" tIns="0" rIns="0" bIns="0" rtlCol="0" anchor="t"/>
+          <a:lstStyle/>
+          <a:p>
+            <a:pPr algn="l" marL="342900" indent="-342900">
+              <a:spcAft>
+                <a:spcPts val="800"/>
+              </a:spcAft>
+              <a:buSzPct val="100000"/>
+              <a:buChar char="•"/>
+            </a:pPr>
+            <a:r>
+              <a:rPr lang="en-US" sz="3600" b="1" dirty="0">
+                <a:solidFill>
+                  <a:srgbClr val="111111"/>
+                </a:solidFill>
+                <a:latin typeface="Times New Roman" pitchFamily="34" charset="0"/>
+                <a:ea typeface="Times New Roman" pitchFamily="34" charset="-122"/>
+                <a:cs typeface="Times New Roman" pitchFamily="34" charset="-120"/>
+              </a:rPr>
+              <a:t>Volcanic soils: </a:t>
+            </a:r>
+            <a:pPr algn="l" marL="342900" indent="-342900">
+              <a:spcAft>
+                <a:spcPts val="800"/>
+              </a:spcAft>
+              <a:buSzPct val="100000"/>
+              <a:buChar char="•"/>
+            </a:pPr>
+            <a:r>
+              <a:rPr lang="en-US" sz="3600" dirty="0">
+                <a:solidFill>
+                  <a:srgbClr val="111111"/>
+                </a:solidFill>
+                <a:latin typeface="Times New Roman" pitchFamily="34" charset="0"/>
+                <a:ea typeface="Times New Roman" pitchFamily="34" charset="-122"/>
+                <a:cs typeface="Times New Roman" pitchFamily="34" charset="-120"/>
+              </a:rPr>
+              <a:t>Very fertile, near Mount Cameroon.</a:t>
+            </a:r>
+            <a:endParaRPr lang="en-US" sz="3600" dirty="0"/>
           </a:p>
         </p:txBody>
       </p:sp>
       <p:pic>
         <p:nvPicPr>
-          <p:cNvPr id="3" name="Image 0" descr="/home/claude/f4/img/minesec_sheet.png">    </p:cNvPr>
+          <p:cNvPr id="5" name="Image 0" descr="/home/claude/f4/img/v2/f2t_mount_cameroon.jpg">    </p:cNvPr>
           <p:cNvPicPr>
             <a:picLocks noChangeAspect="1"/>
           </p:cNvPicPr>
@@ -16374,8 +17122,8 @@
         </p:blipFill>
         <p:spPr>
           <a:xfrm>
-            <a:off x="0" y="658368"/>
-            <a:ext cx="5120640" cy="5833872"/>
+            <a:off x="5349240" y="2071212"/>
+            <a:ext cx="6659575" cy="3693983"/>
           </a:xfrm>
           <a:prstGeom prst="rect">
             <a:avLst/>
@@ -16384,14 +17132,14 @@
       </p:pic>
       <p:sp>
         <p:nvSpPr>
-          <p:cNvPr id="4" name="Text 1"/>
+          <p:cNvPr id="6" name="Text 3"/>
           <p:cNvSpPr/>
           <p:nvPr/>
         </p:nvSpPr>
         <p:spPr>
           <a:xfrm>
-            <a:off x="5349240" y="1005840"/>
-            <a:ext cx="6522415" cy="731520"/>
+            <a:off x="5349240" y="6089904"/>
+            <a:ext cx="6659575" cy="347472"/>
           </a:xfrm>
           <a:prstGeom prst="rect">
             <a:avLst/>
@@ -16400,68 +17148,24 @@
           <a:ln/>
         </p:spPr>
         <p:txBody>
-          <a:bodyPr wrap="square" lIns="0" tIns="0" rIns="0" bIns="0" rtlCol="0" anchor="ctr">
-            <a:normAutofit/>
-          </a:bodyPr>
+          <a:bodyPr wrap="square" lIns="0" tIns="0" rIns="0" bIns="0" rtlCol="0" anchor="ctr"/>
           <a:lstStyle/>
           <a:p>
             <a:pPr algn="ctr" indent="0" marL="0">
               <a:buNone/>
             </a:pPr>
             <a:r>
-              <a:rPr lang="en-US" sz="3600" b="1" dirty="0">
-                <a:solidFill>
-                  <a:srgbClr val="990011"/>
+              <a:rPr lang="en-US" sz="1600" i="1" dirty="0">
+                <a:solidFill>
+                  <a:srgbClr val="555555"/>
                 </a:solidFill>
                 <a:latin typeface="Times New Roman" pitchFamily="34" charset="0"/>
                 <a:ea typeface="Times New Roman" pitchFamily="34" charset="-122"/>
                 <a:cs typeface="Times New Roman" pitchFamily="34" charset="-120"/>
               </a:rPr>
-              <a:t>Expected Answer</a:t>
-            </a:r>
-            <a:endParaRPr lang="en-US" sz="3600" dirty="0"/>
-          </a:p>
-        </p:txBody>
-      </p:sp>
-      <p:sp>
-        <p:nvSpPr>
-          <p:cNvPr id="5" name="Text 2"/>
-          <p:cNvSpPr/>
-          <p:nvPr/>
-        </p:nvSpPr>
-        <p:spPr>
-          <a:xfrm>
-            <a:off x="5349240" y="1783080"/>
-            <a:ext cx="6522415" cy="4663440"/>
-          </a:xfrm>
-          <a:prstGeom prst="rect">
-            <a:avLst/>
-          </a:prstGeom>
-          <a:noFill/>
-          <a:ln/>
-        </p:spPr>
-        <p:txBody>
-          <a:bodyPr wrap="square" lIns="0" tIns="0" rIns="0" bIns="0" rtlCol="0" anchor="t"/>
-          <a:lstStyle/>
-          <a:p>
-            <a:pPr algn="l" indent="0" marL="0">
-              <a:spcAft>
-                <a:spcPts val="800"/>
-              </a:spcAft>
-              <a:buNone/>
-            </a:pPr>
-            <a:r>
-              <a:rPr lang="en-US" sz="4000" dirty="0">
-                <a:solidFill>
-                  <a:srgbClr val="111111"/>
-                </a:solidFill>
-                <a:latin typeface="Times New Roman" pitchFamily="34" charset="0"/>
-                <a:ea typeface="Times New Roman" pitchFamily="34" charset="-122"/>
-                <a:cs typeface="Times New Roman" pitchFamily="34" charset="-120"/>
-              </a:rPr>
-              <a:t>They come from volcanic rocks.</a:t>
-            </a:r>
-            <a:endParaRPr lang="en-US" sz="4000" dirty="0"/>
+              <a:t>Illustration: Mount Cameroon</a:t>
+            </a:r>
+            <a:endParaRPr lang="en-US" sz="1600" dirty="0"/>
           </a:p>
         </p:txBody>
       </p:sp>
@@ -16571,7 +17275,7 @@
                 <a:ea typeface="Calibri" pitchFamily="34" charset="-122"/>
                 <a:cs typeface="Calibri" pitchFamily="34" charset="-120"/>
               </a:rPr>
-              <a:t>REMEDIATION</a:t>
+              <a:t>BOARD SUMMARY</a:t>
             </a:r>
             <a:endParaRPr lang="en-US" sz="1400" dirty="0"/>
           </a:p>
@@ -16594,7 +17298,7 @@
         <p:spPr>
           <a:xfrm>
             <a:off x="0" y="658368"/>
-            <a:ext cx="1463040" cy="5833872"/>
+            <a:ext cx="5120640" cy="5833872"/>
           </a:xfrm>
           <a:prstGeom prst="rect">
             <a:avLst/>
@@ -16609,8 +17313,8 @@
         </p:nvSpPr>
         <p:spPr>
           <a:xfrm>
-            <a:off x="1691640" y="1005840"/>
-            <a:ext cx="10180015" cy="731520"/>
+            <a:off x="5349240" y="1005840"/>
+            <a:ext cx="6522415" cy="731520"/>
           </a:xfrm>
           <a:prstGeom prst="rect">
             <a:avLst/>
@@ -16636,7 +17340,7 @@
                 <a:ea typeface="Times New Roman" pitchFamily="34" charset="-122"/>
                 <a:cs typeface="Times New Roman" pitchFamily="34" charset="-120"/>
               </a:rPr>
-              <a:t>Remediation</a:t>
+              <a:t>3. Soils</a:t>
             </a:r>
             <a:endParaRPr lang="en-US" sz="3600" dirty="0"/>
           </a:p>
@@ -16650,8 +17354,8 @@
         </p:nvSpPr>
         <p:spPr>
           <a:xfrm>
-            <a:off x="1691640" y="1783080"/>
-            <a:ext cx="10180015" cy="4663440"/>
+            <a:off x="5349240" y="1783080"/>
+            <a:ext cx="6522415" cy="4663440"/>
           </a:xfrm>
           <a:prstGeom prst="rect">
             <a:avLst/>
@@ -16662,37 +17366,16 @@
         <p:txBody>
           <a:bodyPr wrap="square" lIns="0" tIns="0" rIns="0" bIns="0" rtlCol="0" anchor="t"/>
           <a:lstStyle/>
-          <a:p>
-            <a:pPr algn="l" indent="0" marL="0">
-              <a:spcAft>
-                <a:spcPts val="800"/>
-              </a:spcAft>
-              <a:buNone/>
-            </a:pPr>
-            <a:r>
-              <a:rPr lang="en-US" sz="4000" b="1" dirty="0">
-                <a:solidFill>
-                  <a:srgbClr val="111111"/>
-                </a:solidFill>
-                <a:latin typeface="Times New Roman" pitchFamily="34" charset="0"/>
-                <a:ea typeface="Times New Roman" pitchFamily="34" charset="-122"/>
-                <a:cs typeface="Times New Roman" pitchFamily="34" charset="-120"/>
-              </a:rPr>
-              <a:t>Fill in the blanks:</a:t>
-            </a:r>
-            <a:endParaRPr lang="en-US" sz="4000" dirty="0"/>
-          </a:p>
           <a:p>
             <a:pPr algn="l" marL="342900" indent="-342900">
               <a:spcAft>
                 <a:spcPts val="800"/>
               </a:spcAft>
               <a:buSzPct val="100000"/>
-              <a:buFont typeface="+mj-lt"/>
-              <a:buAutoNum type="arabicPeriod" startAt="1"/>
+              <a:buChar char="•"/>
             </a:pPr>
             <a:r>
-              <a:rPr lang="en-US" sz="4000" dirty="0">
+              <a:rPr lang="en-US" sz="4000" b="1" dirty="0">
                 <a:solidFill>
                   <a:srgbClr val="111111"/>
                 </a:solidFill>
@@ -16700,18 +17383,14 @@
                 <a:ea typeface="Times New Roman" pitchFamily="34" charset="-122"/>
                 <a:cs typeface="Times New Roman" pitchFamily="34" charset="-120"/>
               </a:rPr>
-              <a:t>Around the Equator, the climate is ______.</a:t>
-            </a:r>
-            <a:endParaRPr lang="en-US" sz="4000" dirty="0"/>
-          </a:p>
-          <a:p>
+              <a:t>Alluvial soils: </a:t>
+            </a:r>
             <a:pPr algn="l" marL="342900" indent="-342900">
               <a:spcAft>
                 <a:spcPts val="800"/>
               </a:spcAft>
               <a:buSzPct val="100000"/>
-              <a:buFont typeface="+mj-lt"/>
-              <a:buAutoNum type="arabicPeriod" startAt="1"/>
+              <a:buChar char="•"/>
             </a:pPr>
             <a:r>
               <a:rPr lang="en-US" sz="4000" dirty="0">
@@ -16722,29 +17401,7 @@
                 <a:ea typeface="Times New Roman" pitchFamily="34" charset="-122"/>
                 <a:cs typeface="Times New Roman" pitchFamily="34" charset="-120"/>
               </a:rPr>
-              <a:t>The long valley of East Africa is the Great ______ Valley.</a:t>
-            </a:r>
-            <a:endParaRPr lang="en-US" sz="4000" dirty="0"/>
-          </a:p>
-          <a:p>
-            <a:pPr algn="l" marL="342900" indent="-342900">
-              <a:spcAft>
-                <a:spcPts val="800"/>
-              </a:spcAft>
-              <a:buSzPct val="100000"/>
-              <a:buFont typeface="+mj-lt"/>
-              <a:buAutoNum type="arabicPeriod" startAt="1"/>
-            </a:pPr>
-            <a:r>
-              <a:rPr lang="en-US" sz="4000" dirty="0">
-                <a:solidFill>
-                  <a:srgbClr val="111111"/>
-                </a:solidFill>
-                <a:latin typeface="Times New Roman" pitchFamily="34" charset="0"/>
-                <a:ea typeface="Times New Roman" pitchFamily="34" charset="-122"/>
-                <a:cs typeface="Times New Roman" pitchFamily="34" charset="-120"/>
-              </a:rPr>
-              <a:t>Soils made from volcano rocks are ______ soils.</a:t>
+              <a:t>Fertile soils in river valleys, like the Nile.</a:t>
             </a:r>
             <a:endParaRPr lang="en-US" sz="4000" dirty="0"/>
           </a:p>
@@ -16856,7 +17513,7 @@
                 <a:ea typeface="Calibri" pitchFamily="34" charset="-122"/>
                 <a:cs typeface="Calibri" pitchFamily="34" charset="-120"/>
               </a:rPr>
-              <a:t>HOMEWORK</a:t>
+              <a:t>FORMATIVE EVALUATION</a:t>
             </a:r>
             <a:endParaRPr lang="en-US" sz="1400" dirty="0"/>
           </a:p>
@@ -16921,7 +17578,7 @@
                 <a:ea typeface="Times New Roman" pitchFamily="34" charset="-122"/>
                 <a:cs typeface="Times New Roman" pitchFamily="34" charset="-120"/>
               </a:rPr>
-              <a:t>Homework</a:t>
+              <a:t>Evaluation 1</a:t>
             </a:r>
             <a:endParaRPr lang="en-US" sz="3600" dirty="0"/>
           </a:p>
@@ -16963,7 +17620,7 @@
                 <a:ea typeface="Times New Roman" pitchFamily="34" charset="-122"/>
                 <a:cs typeface="Times New Roman" pitchFamily="34" charset="-120"/>
               </a:rPr>
-              <a:t>Look at a map of Africa and write the names of three big rivers. Say into which ocean or sea each one flows.</a:t>
+              <a:t>Why is Nairobi cool though it is near the Equator?</a:t>
             </a:r>
             <a:endParaRPr lang="en-US" sz="4000" dirty="0"/>
           </a:p>
@@ -17075,7 +17732,7 @@
                 <a:ea typeface="Calibri" pitchFamily="34" charset="-122"/>
                 <a:cs typeface="Calibri" pitchFamily="34" charset="-120"/>
               </a:rPr>
-              <a:t>NEXT LESSON</a:t>
+              <a:t>FORMATIVE EVALUATION</a:t>
             </a:r>
             <a:endParaRPr lang="en-US" sz="1400" dirty="0"/>
           </a:p>
@@ -17140,7 +17797,7 @@
                 <a:ea typeface="Times New Roman" pitchFamily="34" charset="-122"/>
                 <a:cs typeface="Times New Roman" pitchFamily="34" charset="-120"/>
               </a:rPr>
-              <a:t>Next Lesson</a:t>
+              <a:t>Expected Answer</a:t>
             </a:r>
             <a:endParaRPr lang="en-US" sz="3600" dirty="0"/>
           </a:p>
@@ -17164,17 +17821,17 @@
           <a:ln/>
         </p:spPr>
         <p:txBody>
-          <a:bodyPr wrap="square" lIns="0" tIns="0" rIns="0" bIns="0" rtlCol="0" anchor="ctr"/>
-          <a:lstStyle/>
-          <a:p>
-            <a:pPr algn="ctr" indent="0" marL="0">
+          <a:bodyPr wrap="square" lIns="0" tIns="0" rIns="0" bIns="0" rtlCol="0" anchor="t"/>
+          <a:lstStyle/>
+          <a:p>
+            <a:pPr algn="l" indent="0" marL="0">
               <a:spcAft>
                 <a:spcPts val="800"/>
               </a:spcAft>
               <a:buNone/>
             </a:pPr>
             <a:r>
-              <a:rPr lang="en-US" sz="4000" b="1" dirty="0">
+              <a:rPr lang="en-US" sz="4000" dirty="0">
                 <a:solidFill>
                   <a:srgbClr val="111111"/>
                 </a:solidFill>
@@ -17182,27 +17839,7 @@
                 <a:ea typeface="Times New Roman" pitchFamily="34" charset="-122"/>
                 <a:cs typeface="Times New Roman" pitchFamily="34" charset="-120"/>
               </a:rPr>
-              <a:t>Our next lesson will be on:</a:t>
-            </a:r>
-            <a:endParaRPr lang="en-US" sz="4000" dirty="0"/>
-          </a:p>
-          <a:p>
-            <a:pPr algn="ctr" indent="0" marL="0">
-              <a:spcAft>
-                <a:spcPts val="800"/>
-              </a:spcAft>
-              <a:buNone/>
-            </a:pPr>
-            <a:r>
-              <a:rPr lang="en-US" sz="4000" b="1" dirty="0">
-                <a:solidFill>
-                  <a:srgbClr val="990011"/>
-                </a:solidFill>
-                <a:latin typeface="Times New Roman" pitchFamily="34" charset="0"/>
-                <a:ea typeface="Times New Roman" pitchFamily="34" charset="-122"/>
-                <a:cs typeface="Times New Roman" pitchFamily="34" charset="-120"/>
-              </a:rPr>
-              <a:t>Lesson 6 (Part 3): Africa: Vegetation and Drainage of Africa</a:t>
+              <a:t>Because it is high.</a:t>
             </a:r>
             <a:endParaRPr lang="en-US" sz="4000" dirty="0"/>
           </a:p>
@@ -17314,6 +17951,1406 @@
                 <a:ea typeface="Calibri" pitchFamily="34" charset="-122"/>
                 <a:cs typeface="Calibri" pitchFamily="34" charset="-120"/>
               </a:rPr>
+              <a:t>FORMATIVE EVALUATION</a:t>
+            </a:r>
+            <a:endParaRPr lang="en-US" sz="1400" dirty="0"/>
+          </a:p>
+        </p:txBody>
+      </p:sp>
+      <p:pic>
+        <p:nvPicPr>
+          <p:cNvPr id="3" name="Image 0" descr="/home/claude/f4/img/minesec_sheet.png">    </p:cNvPr>
+          <p:cNvPicPr>
+            <a:picLocks noChangeAspect="1"/>
+          </p:cNvPicPr>
+          <p:nvPr/>
+        </p:nvPicPr>
+        <p:blipFill>
+          <a:blip r:embed="rId1"/>
+          <a:stretch>
+            <a:fillRect/>
+          </a:stretch>
+        </p:blipFill>
+        <p:spPr>
+          <a:xfrm>
+            <a:off x="0" y="658368"/>
+            <a:ext cx="5120640" cy="5833872"/>
+          </a:xfrm>
+          <a:prstGeom prst="rect">
+            <a:avLst/>
+          </a:prstGeom>
+        </p:spPr>
+      </p:pic>
+      <p:sp>
+        <p:nvSpPr>
+          <p:cNvPr id="4" name="Text 1"/>
+          <p:cNvSpPr/>
+          <p:nvPr/>
+        </p:nvSpPr>
+        <p:spPr>
+          <a:xfrm>
+            <a:off x="5349240" y="1005840"/>
+            <a:ext cx="6522415" cy="731520"/>
+          </a:xfrm>
+          <a:prstGeom prst="rect">
+            <a:avLst/>
+          </a:prstGeom>
+          <a:noFill/>
+          <a:ln/>
+        </p:spPr>
+        <p:txBody>
+          <a:bodyPr wrap="square" lIns="0" tIns="0" rIns="0" bIns="0" rtlCol="0" anchor="ctr">
+            <a:normAutofit/>
+          </a:bodyPr>
+          <a:lstStyle/>
+          <a:p>
+            <a:pPr algn="ctr" indent="0" marL="0">
+              <a:buNone/>
+            </a:pPr>
+            <a:r>
+              <a:rPr lang="en-US" sz="3600" b="1" dirty="0">
+                <a:solidFill>
+                  <a:srgbClr val="990011"/>
+                </a:solidFill>
+                <a:latin typeface="Times New Roman" pitchFamily="34" charset="0"/>
+                <a:ea typeface="Times New Roman" pitchFamily="34" charset="-122"/>
+                <a:cs typeface="Times New Roman" pitchFamily="34" charset="-120"/>
+              </a:rPr>
+              <a:t>Evaluation 2</a:t>
+            </a:r>
+            <a:endParaRPr lang="en-US" sz="3600" dirty="0"/>
+          </a:p>
+        </p:txBody>
+      </p:sp>
+      <p:sp>
+        <p:nvSpPr>
+          <p:cNvPr id="5" name="Text 2"/>
+          <p:cNvSpPr/>
+          <p:nvPr/>
+        </p:nvSpPr>
+        <p:spPr>
+          <a:xfrm>
+            <a:off x="5349240" y="1783080"/>
+            <a:ext cx="6522415" cy="4663440"/>
+          </a:xfrm>
+          <a:prstGeom prst="rect">
+            <a:avLst/>
+          </a:prstGeom>
+          <a:noFill/>
+          <a:ln/>
+        </p:spPr>
+        <p:txBody>
+          <a:bodyPr wrap="square" lIns="0" tIns="0" rIns="0" bIns="0" rtlCol="0" anchor="t"/>
+          <a:lstStyle/>
+          <a:p>
+            <a:pPr algn="l" indent="0" marL="0">
+              <a:spcAft>
+                <a:spcPts val="800"/>
+              </a:spcAft>
+              <a:buNone/>
+            </a:pPr>
+            <a:r>
+              <a:rPr lang="en-US" sz="4000" dirty="0">
+                <a:solidFill>
+                  <a:srgbClr val="111111"/>
+                </a:solidFill>
+                <a:latin typeface="Times New Roman" pitchFamily="34" charset="0"/>
+                <a:ea typeface="Times New Roman" pitchFamily="34" charset="-122"/>
+                <a:cs typeface="Times New Roman" pitchFamily="34" charset="-120"/>
+              </a:rPr>
+              <a:t>Why are the soils of Mount Cameroon fertile?</a:t>
+            </a:r>
+            <a:endParaRPr lang="en-US" sz="4000" dirty="0"/>
+          </a:p>
+        </p:txBody>
+      </p:sp>
+      <p:sp>
+        <p:nvSpPr>
+          <p:cNvPr id="25" name="Slide Number Placeholder 0"/>
+          <p:cNvSpPr>
+            <a:spLocks noGrp="1"/>
+          </p:cNvSpPr>
+          <p:nvPr>
+            <p:ph type="sldNum" sz="quarter" idx="4294967295"/>
+          </p:nvPr>
+        </p:nvSpPr>
+        <p:spPr>
+          <a:xfrm>
+            <a:off x="27432" y="91440"/>
+            <a:ext cx="585216" cy="475488"/>
+          </a:xfrm>
+          <a:prstGeom prst="rect">
+            <a:avLst/>
+          </a:prstGeom>
+          <a:extLst>
+            <a:ext uri="{C572A759-6A51-4108-AA02-DFA0A04FC94B}">
+              <ma14:wrappingTextBoxFlag xmlns:ma14="http://schemas.microsoft.com/office/mac/drawingml/2011/main" val="0"/>
+            </a:ext>
+          </a:extLst>
+        </p:spPr>
+        <p:txBody>
+          <a:bodyPr/>
+          <a:lstStyle>
+            <a:lvl1pPr>
+              <a:defRPr sz="2000">
+                <a:solidFill>
+                  <a:srgbClr val="FFFFFF"/>
+                </a:solidFill>
+                <a:latin typeface="Calibri"/>
+                <a:ea typeface="Calibri"/>
+                <a:cs typeface="Calibri"/>
+              </a:defRPr>
+            </a:lvl1pPr>
+          </a:lstStyle>
+          <a:p>
+            <a:pPr algn="ctr"/>
+            <a:fld id="{F7021451-1387-4CA6-816F-3879F97B5CBC}" type="slidenum">
+              <a:rPr b="1" lang="en-US"/>
+              <a:t>49</a:t>
+            </a:fld>
+            <a:endParaRPr lang="en-US"/>
+          </a:p>
+        </p:txBody>
+      </p:sp>
+    </p:spTree>
+  </p:cSld>
+  <p:clrMapOvr>
+    <a:masterClrMapping/>
+  </p:clrMapOvr>
+</p:sld>
+</file>
+
+<file path=ppt/slides/slide5.xml><?xml version="1.0" encoding="utf-8"?>
+<p:sld xmlns:a="http://schemas.openxmlformats.org/drawingml/2006/main" xmlns:r="http://schemas.openxmlformats.org/officeDocument/2006/relationships" xmlns:p="http://schemas.openxmlformats.org/presentationml/2006/main">
+  <p:cSld name="Slide 5">
+    <p:spTree>
+      <p:nvGrpSpPr>
+        <p:cNvPr id="1" name=""/>
+        <p:cNvGrpSpPr/>
+        <p:nvPr/>
+      </p:nvGrpSpPr>
+      <p:grpSpPr>
+        <a:xfrm>
+          <a:off x="0" y="0"/>
+          <a:ext cx="0" cy="0"/>
+          <a:chOff x="0" y="0"/>
+          <a:chExt cx="0" cy="0"/>
+        </a:xfrm>
+      </p:grpSpPr>
+      <p:sp>
+        <p:nvSpPr>
+          <p:cNvPr id="2" name="Text 0"/>
+          <p:cNvSpPr/>
+          <p:nvPr/>
+        </p:nvSpPr>
+        <p:spPr>
+          <a:xfrm>
+            <a:off x="457200" y="713232"/>
+            <a:ext cx="11368735" cy="274320"/>
+          </a:xfrm>
+          <a:prstGeom prst="rect">
+            <a:avLst/>
+          </a:prstGeom>
+          <a:noFill/>
+          <a:ln/>
+        </p:spPr>
+        <p:txBody>
+          <a:bodyPr wrap="square" lIns="0" tIns="0" rIns="0" bIns="0" rtlCol="0" anchor="ctr"/>
+          <a:lstStyle/>
+          <a:p>
+            <a:pPr algn="r" indent="0" marL="0">
+              <a:buNone/>
+            </a:pPr>
+            <a:r>
+              <a:rPr lang="en-US" sz="1400" b="1" dirty="0">
+                <a:solidFill>
+                  <a:srgbClr val="1C3F6E"/>
+                </a:solidFill>
+                <a:latin typeface="Calibri" pitchFamily="34" charset="0"/>
+                <a:ea typeface="Calibri" pitchFamily="34" charset="-122"/>
+                <a:cs typeface="Calibri" pitchFamily="34" charset="-120"/>
+              </a:rPr>
+              <a:t>HOMEWORK CORRECTION</a:t>
+            </a:r>
+            <a:endParaRPr lang="en-US" sz="1400" dirty="0"/>
+          </a:p>
+        </p:txBody>
+      </p:sp>
+      <p:pic>
+        <p:nvPicPr>
+          <p:cNvPr id="3" name="Image 0" descr="/home/claude/f4/img/minesec_sheet.png">    </p:cNvPr>
+          <p:cNvPicPr>
+            <a:picLocks noChangeAspect="1"/>
+          </p:cNvPicPr>
+          <p:nvPr/>
+        </p:nvPicPr>
+        <p:blipFill>
+          <a:blip r:embed="rId1"/>
+          <a:stretch>
+            <a:fillRect/>
+          </a:stretch>
+        </p:blipFill>
+        <p:spPr>
+          <a:xfrm>
+            <a:off x="0" y="658368"/>
+            <a:ext cx="5120640" cy="5833872"/>
+          </a:xfrm>
+          <a:prstGeom prst="rect">
+            <a:avLst/>
+          </a:prstGeom>
+        </p:spPr>
+      </p:pic>
+      <p:sp>
+        <p:nvSpPr>
+          <p:cNvPr id="4" name="Text 1"/>
+          <p:cNvSpPr/>
+          <p:nvPr/>
+        </p:nvSpPr>
+        <p:spPr>
+          <a:xfrm>
+            <a:off x="5349240" y="1005840"/>
+            <a:ext cx="6522415" cy="731520"/>
+          </a:xfrm>
+          <a:prstGeom prst="rect">
+            <a:avLst/>
+          </a:prstGeom>
+          <a:noFill/>
+          <a:ln/>
+        </p:spPr>
+        <p:txBody>
+          <a:bodyPr wrap="square" lIns="0" tIns="0" rIns="0" bIns="0" rtlCol="0" anchor="ctr">
+            <a:normAutofit/>
+          </a:bodyPr>
+          <a:lstStyle/>
+          <a:p>
+            <a:pPr algn="ctr" indent="0" marL="0">
+              <a:buNone/>
+            </a:pPr>
+            <a:r>
+              <a:rPr lang="en-US" sz="3600" b="1" dirty="0">
+                <a:solidFill>
+                  <a:srgbClr val="990011"/>
+                </a:solidFill>
+                <a:latin typeface="Times New Roman" pitchFamily="34" charset="0"/>
+                <a:ea typeface="Times New Roman" pitchFamily="34" charset="-122"/>
+                <a:cs typeface="Times New Roman" pitchFamily="34" charset="-120"/>
+              </a:rPr>
+              <a:t>Correction: Possible Answer</a:t>
+            </a:r>
+            <a:endParaRPr lang="en-US" sz="3600" dirty="0"/>
+          </a:p>
+        </p:txBody>
+      </p:sp>
+      <p:sp>
+        <p:nvSpPr>
+          <p:cNvPr id="5" name="Text 2"/>
+          <p:cNvSpPr/>
+          <p:nvPr/>
+        </p:nvSpPr>
+        <p:spPr>
+          <a:xfrm>
+            <a:off x="5349240" y="1783080"/>
+            <a:ext cx="6522415" cy="4663440"/>
+          </a:xfrm>
+          <a:prstGeom prst="rect">
+            <a:avLst/>
+          </a:prstGeom>
+          <a:noFill/>
+          <a:ln/>
+        </p:spPr>
+        <p:txBody>
+          <a:bodyPr wrap="square" lIns="0" tIns="0" rIns="0" bIns="0" rtlCol="0" anchor="t"/>
+          <a:lstStyle/>
+          <a:p>
+            <a:pPr algn="l" indent="0" marL="0">
+              <a:spcAft>
+                <a:spcPts val="800"/>
+              </a:spcAft>
+              <a:buNone/>
+            </a:pPr>
+            <a:r>
+              <a:rPr lang="en-US" sz="4000" dirty="0">
+                <a:solidFill>
+                  <a:srgbClr val="111111"/>
+                </a:solidFill>
+                <a:latin typeface="Times New Roman" pitchFamily="34" charset="0"/>
+                <a:ea typeface="Times New Roman" pitchFamily="34" charset="-122"/>
+                <a:cs typeface="Times New Roman" pitchFamily="34" charset="-120"/>
+              </a:rPr>
+              <a:t>Douala is the wettest (about 4,000 mm of rain a year); Maroua is the driest (about 800 mm); Garoua is in between (about 1,000 mm).</a:t>
+            </a:r>
+            <a:endParaRPr lang="en-US" sz="4000" dirty="0"/>
+          </a:p>
+        </p:txBody>
+      </p:sp>
+      <p:sp>
+        <p:nvSpPr>
+          <p:cNvPr id="25" name="Slide Number Placeholder 0"/>
+          <p:cNvSpPr>
+            <a:spLocks noGrp="1"/>
+          </p:cNvSpPr>
+          <p:nvPr>
+            <p:ph type="sldNum" sz="quarter" idx="4294967295"/>
+          </p:nvPr>
+        </p:nvSpPr>
+        <p:spPr>
+          <a:xfrm>
+            <a:off x="27432" y="91440"/>
+            <a:ext cx="585216" cy="475488"/>
+          </a:xfrm>
+          <a:prstGeom prst="rect">
+            <a:avLst/>
+          </a:prstGeom>
+          <a:extLst>
+            <a:ext uri="{C572A759-6A51-4108-AA02-DFA0A04FC94B}">
+              <ma14:wrappingTextBoxFlag xmlns:ma14="http://schemas.microsoft.com/office/mac/drawingml/2011/main" val="0"/>
+            </a:ext>
+          </a:extLst>
+        </p:spPr>
+        <p:txBody>
+          <a:bodyPr/>
+          <a:lstStyle>
+            <a:lvl1pPr>
+              <a:defRPr sz="2000">
+                <a:solidFill>
+                  <a:srgbClr val="FFFFFF"/>
+                </a:solidFill>
+                <a:latin typeface="Calibri"/>
+                <a:ea typeface="Calibri"/>
+                <a:cs typeface="Calibri"/>
+              </a:defRPr>
+            </a:lvl1pPr>
+          </a:lstStyle>
+          <a:p>
+            <a:pPr algn="ctr"/>
+            <a:fld id="{F7021451-1387-4CA6-816F-3879F97B5CBC}" type="slidenum">
+              <a:rPr b="1" lang="en-US"/>
+              <a:t>5</a:t>
+            </a:fld>
+            <a:endParaRPr lang="en-US"/>
+          </a:p>
+        </p:txBody>
+      </p:sp>
+    </p:spTree>
+  </p:cSld>
+  <p:clrMapOvr>
+    <a:masterClrMapping/>
+  </p:clrMapOvr>
+</p:sld>
+</file>
+
+<file path=ppt/slides/slide50.xml><?xml version="1.0" encoding="utf-8"?>
+<p:sld xmlns:a="http://schemas.openxmlformats.org/drawingml/2006/main" xmlns:r="http://schemas.openxmlformats.org/officeDocument/2006/relationships" xmlns:p="http://schemas.openxmlformats.org/presentationml/2006/main">
+  <p:cSld name="Slide 50">
+    <p:spTree>
+      <p:nvGrpSpPr>
+        <p:cNvPr id="1" name=""/>
+        <p:cNvGrpSpPr/>
+        <p:nvPr/>
+      </p:nvGrpSpPr>
+      <p:grpSpPr>
+        <a:xfrm>
+          <a:off x="0" y="0"/>
+          <a:ext cx="0" cy="0"/>
+          <a:chOff x="0" y="0"/>
+          <a:chExt cx="0" cy="0"/>
+        </a:xfrm>
+      </p:grpSpPr>
+      <p:sp>
+        <p:nvSpPr>
+          <p:cNvPr id="2" name="Text 0"/>
+          <p:cNvSpPr/>
+          <p:nvPr/>
+        </p:nvSpPr>
+        <p:spPr>
+          <a:xfrm>
+            <a:off x="457200" y="713232"/>
+            <a:ext cx="11368735" cy="274320"/>
+          </a:xfrm>
+          <a:prstGeom prst="rect">
+            <a:avLst/>
+          </a:prstGeom>
+          <a:noFill/>
+          <a:ln/>
+        </p:spPr>
+        <p:txBody>
+          <a:bodyPr wrap="square" lIns="0" tIns="0" rIns="0" bIns="0" rtlCol="0" anchor="ctr"/>
+          <a:lstStyle/>
+          <a:p>
+            <a:pPr algn="r" indent="0" marL="0">
+              <a:buNone/>
+            </a:pPr>
+            <a:r>
+              <a:rPr lang="en-US" sz="1400" b="1" dirty="0">
+                <a:solidFill>
+                  <a:srgbClr val="1C3F6E"/>
+                </a:solidFill>
+                <a:latin typeface="Calibri" pitchFamily="34" charset="0"/>
+                <a:ea typeface="Calibri" pitchFamily="34" charset="-122"/>
+                <a:cs typeface="Calibri" pitchFamily="34" charset="-120"/>
+              </a:rPr>
+              <a:t>FORMATIVE EVALUATION</a:t>
+            </a:r>
+            <a:endParaRPr lang="en-US" sz="1400" dirty="0"/>
+          </a:p>
+        </p:txBody>
+      </p:sp>
+      <p:pic>
+        <p:nvPicPr>
+          <p:cNvPr id="3" name="Image 0" descr="/home/claude/f4/img/minesec_sheet.png">    </p:cNvPr>
+          <p:cNvPicPr>
+            <a:picLocks noChangeAspect="1"/>
+          </p:cNvPicPr>
+          <p:nvPr/>
+        </p:nvPicPr>
+        <p:blipFill>
+          <a:blip r:embed="rId1"/>
+          <a:stretch>
+            <a:fillRect/>
+          </a:stretch>
+        </p:blipFill>
+        <p:spPr>
+          <a:xfrm>
+            <a:off x="0" y="658368"/>
+            <a:ext cx="5120640" cy="5833872"/>
+          </a:xfrm>
+          <a:prstGeom prst="rect">
+            <a:avLst/>
+          </a:prstGeom>
+        </p:spPr>
+      </p:pic>
+      <p:sp>
+        <p:nvSpPr>
+          <p:cNvPr id="4" name="Text 1"/>
+          <p:cNvSpPr/>
+          <p:nvPr/>
+        </p:nvSpPr>
+        <p:spPr>
+          <a:xfrm>
+            <a:off x="5349240" y="1005840"/>
+            <a:ext cx="6522415" cy="731520"/>
+          </a:xfrm>
+          <a:prstGeom prst="rect">
+            <a:avLst/>
+          </a:prstGeom>
+          <a:noFill/>
+          <a:ln/>
+        </p:spPr>
+        <p:txBody>
+          <a:bodyPr wrap="square" lIns="0" tIns="0" rIns="0" bIns="0" rtlCol="0" anchor="ctr">
+            <a:normAutofit/>
+          </a:bodyPr>
+          <a:lstStyle/>
+          <a:p>
+            <a:pPr algn="ctr" indent="0" marL="0">
+              <a:buNone/>
+            </a:pPr>
+            <a:r>
+              <a:rPr lang="en-US" sz="3600" b="1" dirty="0">
+                <a:solidFill>
+                  <a:srgbClr val="990011"/>
+                </a:solidFill>
+                <a:latin typeface="Times New Roman" pitchFamily="34" charset="0"/>
+                <a:ea typeface="Times New Roman" pitchFamily="34" charset="-122"/>
+                <a:cs typeface="Times New Roman" pitchFamily="34" charset="-120"/>
+              </a:rPr>
+              <a:t>Expected Answer</a:t>
+            </a:r>
+            <a:endParaRPr lang="en-US" sz="3600" dirty="0"/>
+          </a:p>
+        </p:txBody>
+      </p:sp>
+      <p:sp>
+        <p:nvSpPr>
+          <p:cNvPr id="5" name="Text 2"/>
+          <p:cNvSpPr/>
+          <p:nvPr/>
+        </p:nvSpPr>
+        <p:spPr>
+          <a:xfrm>
+            <a:off x="5349240" y="1783080"/>
+            <a:ext cx="6522415" cy="4663440"/>
+          </a:xfrm>
+          <a:prstGeom prst="rect">
+            <a:avLst/>
+          </a:prstGeom>
+          <a:noFill/>
+          <a:ln/>
+        </p:spPr>
+        <p:txBody>
+          <a:bodyPr wrap="square" lIns="0" tIns="0" rIns="0" bIns="0" rtlCol="0" anchor="t"/>
+          <a:lstStyle/>
+          <a:p>
+            <a:pPr algn="l" indent="0" marL="0">
+              <a:spcAft>
+                <a:spcPts val="800"/>
+              </a:spcAft>
+              <a:buNone/>
+            </a:pPr>
+            <a:r>
+              <a:rPr lang="en-US" sz="4000" dirty="0">
+                <a:solidFill>
+                  <a:srgbClr val="111111"/>
+                </a:solidFill>
+                <a:latin typeface="Times New Roman" pitchFamily="34" charset="0"/>
+                <a:ea typeface="Times New Roman" pitchFamily="34" charset="-122"/>
+                <a:cs typeface="Times New Roman" pitchFamily="34" charset="-120"/>
+              </a:rPr>
+              <a:t>They come from volcanic rocks.</a:t>
+            </a:r>
+            <a:endParaRPr lang="en-US" sz="4000" dirty="0"/>
+          </a:p>
+        </p:txBody>
+      </p:sp>
+      <p:sp>
+        <p:nvSpPr>
+          <p:cNvPr id="25" name="Slide Number Placeholder 0"/>
+          <p:cNvSpPr>
+            <a:spLocks noGrp="1"/>
+          </p:cNvSpPr>
+          <p:nvPr>
+            <p:ph type="sldNum" sz="quarter" idx="4294967295"/>
+          </p:nvPr>
+        </p:nvSpPr>
+        <p:spPr>
+          <a:xfrm>
+            <a:off x="27432" y="91440"/>
+            <a:ext cx="585216" cy="475488"/>
+          </a:xfrm>
+          <a:prstGeom prst="rect">
+            <a:avLst/>
+          </a:prstGeom>
+          <a:extLst>
+            <a:ext uri="{C572A759-6A51-4108-AA02-DFA0A04FC94B}">
+              <ma14:wrappingTextBoxFlag xmlns:ma14="http://schemas.microsoft.com/office/mac/drawingml/2011/main" val="0"/>
+            </a:ext>
+          </a:extLst>
+        </p:spPr>
+        <p:txBody>
+          <a:bodyPr/>
+          <a:lstStyle>
+            <a:lvl1pPr>
+              <a:defRPr sz="2000">
+                <a:solidFill>
+                  <a:srgbClr val="FFFFFF"/>
+                </a:solidFill>
+                <a:latin typeface="Calibri"/>
+                <a:ea typeface="Calibri"/>
+                <a:cs typeface="Calibri"/>
+              </a:defRPr>
+            </a:lvl1pPr>
+          </a:lstStyle>
+          <a:p>
+            <a:pPr algn="ctr"/>
+            <a:fld id="{F7021451-1387-4CA6-816F-3879F97B5CBC}" type="slidenum">
+              <a:rPr b="1" lang="en-US"/>
+              <a:t>50</a:t>
+            </a:fld>
+            <a:endParaRPr lang="en-US"/>
+          </a:p>
+        </p:txBody>
+      </p:sp>
+    </p:spTree>
+  </p:cSld>
+  <p:clrMapOvr>
+    <a:masterClrMapping/>
+  </p:clrMapOvr>
+</p:sld>
+</file>
+
+<file path=ppt/slides/slide51.xml><?xml version="1.0" encoding="utf-8"?>
+<p:sld xmlns:a="http://schemas.openxmlformats.org/drawingml/2006/main" xmlns:r="http://schemas.openxmlformats.org/officeDocument/2006/relationships" xmlns:p="http://schemas.openxmlformats.org/presentationml/2006/main">
+  <p:cSld name="Slide 51">
+    <p:spTree>
+      <p:nvGrpSpPr>
+        <p:cNvPr id="1" name=""/>
+        <p:cNvGrpSpPr/>
+        <p:nvPr/>
+      </p:nvGrpSpPr>
+      <p:grpSpPr>
+        <a:xfrm>
+          <a:off x="0" y="0"/>
+          <a:ext cx="0" cy="0"/>
+          <a:chOff x="0" y="0"/>
+          <a:chExt cx="0" cy="0"/>
+        </a:xfrm>
+      </p:grpSpPr>
+      <p:sp>
+        <p:nvSpPr>
+          <p:cNvPr id="2" name="Text 0"/>
+          <p:cNvSpPr/>
+          <p:nvPr/>
+        </p:nvSpPr>
+        <p:spPr>
+          <a:xfrm>
+            <a:off x="457200" y="713232"/>
+            <a:ext cx="11368735" cy="274320"/>
+          </a:xfrm>
+          <a:prstGeom prst="rect">
+            <a:avLst/>
+          </a:prstGeom>
+          <a:noFill/>
+          <a:ln/>
+        </p:spPr>
+        <p:txBody>
+          <a:bodyPr wrap="square" lIns="0" tIns="0" rIns="0" bIns="0" rtlCol="0" anchor="ctr"/>
+          <a:lstStyle/>
+          <a:p>
+            <a:pPr algn="r" indent="0" marL="0">
+              <a:buNone/>
+            </a:pPr>
+            <a:r>
+              <a:rPr lang="en-US" sz="1400" b="1" dirty="0">
+                <a:solidFill>
+                  <a:srgbClr val="1C3F6E"/>
+                </a:solidFill>
+                <a:latin typeface="Calibri" pitchFamily="34" charset="0"/>
+                <a:ea typeface="Calibri" pitchFamily="34" charset="-122"/>
+                <a:cs typeface="Calibri" pitchFamily="34" charset="-120"/>
+              </a:rPr>
+              <a:t>REMEDIATION</a:t>
+            </a:r>
+            <a:endParaRPr lang="en-US" sz="1400" dirty="0"/>
+          </a:p>
+        </p:txBody>
+      </p:sp>
+      <p:pic>
+        <p:nvPicPr>
+          <p:cNvPr id="3" name="Image 0" descr="/home/claude/f4/img/minesec_sheet.png">    </p:cNvPr>
+          <p:cNvPicPr>
+            <a:picLocks noChangeAspect="1"/>
+          </p:cNvPicPr>
+          <p:nvPr/>
+        </p:nvPicPr>
+        <p:blipFill>
+          <a:blip r:embed="rId1"/>
+          <a:stretch>
+            <a:fillRect/>
+          </a:stretch>
+        </p:blipFill>
+        <p:spPr>
+          <a:xfrm>
+            <a:off x="0" y="658368"/>
+            <a:ext cx="1463040" cy="5833872"/>
+          </a:xfrm>
+          <a:prstGeom prst="rect">
+            <a:avLst/>
+          </a:prstGeom>
+        </p:spPr>
+      </p:pic>
+      <p:sp>
+        <p:nvSpPr>
+          <p:cNvPr id="4" name="Text 1"/>
+          <p:cNvSpPr/>
+          <p:nvPr/>
+        </p:nvSpPr>
+        <p:spPr>
+          <a:xfrm>
+            <a:off x="1691640" y="1005840"/>
+            <a:ext cx="10180015" cy="731520"/>
+          </a:xfrm>
+          <a:prstGeom prst="rect">
+            <a:avLst/>
+          </a:prstGeom>
+          <a:noFill/>
+          <a:ln/>
+        </p:spPr>
+        <p:txBody>
+          <a:bodyPr wrap="square" lIns="0" tIns="0" rIns="0" bIns="0" rtlCol="0" anchor="ctr">
+            <a:normAutofit/>
+          </a:bodyPr>
+          <a:lstStyle/>
+          <a:p>
+            <a:pPr algn="ctr" indent="0" marL="0">
+              <a:buNone/>
+            </a:pPr>
+            <a:r>
+              <a:rPr lang="en-US" sz="3600" b="1" dirty="0">
+                <a:solidFill>
+                  <a:srgbClr val="990011"/>
+                </a:solidFill>
+                <a:latin typeface="Times New Roman" pitchFamily="34" charset="0"/>
+                <a:ea typeface="Times New Roman" pitchFamily="34" charset="-122"/>
+                <a:cs typeface="Times New Roman" pitchFamily="34" charset="-120"/>
+              </a:rPr>
+              <a:t>Remediation</a:t>
+            </a:r>
+            <a:endParaRPr lang="en-US" sz="3600" dirty="0"/>
+          </a:p>
+        </p:txBody>
+      </p:sp>
+      <p:sp>
+        <p:nvSpPr>
+          <p:cNvPr id="5" name="Text 2"/>
+          <p:cNvSpPr/>
+          <p:nvPr/>
+        </p:nvSpPr>
+        <p:spPr>
+          <a:xfrm>
+            <a:off x="1691640" y="1783080"/>
+            <a:ext cx="10180015" cy="4663440"/>
+          </a:xfrm>
+          <a:prstGeom prst="rect">
+            <a:avLst/>
+          </a:prstGeom>
+          <a:noFill/>
+          <a:ln/>
+        </p:spPr>
+        <p:txBody>
+          <a:bodyPr wrap="square" lIns="0" tIns="0" rIns="0" bIns="0" rtlCol="0" anchor="t"/>
+          <a:lstStyle/>
+          <a:p>
+            <a:pPr algn="l" indent="0" marL="0">
+              <a:spcAft>
+                <a:spcPts val="800"/>
+              </a:spcAft>
+              <a:buNone/>
+            </a:pPr>
+            <a:r>
+              <a:rPr lang="en-US" sz="4000" b="1" dirty="0">
+                <a:solidFill>
+                  <a:srgbClr val="111111"/>
+                </a:solidFill>
+                <a:latin typeface="Times New Roman" pitchFamily="34" charset="0"/>
+                <a:ea typeface="Times New Roman" pitchFamily="34" charset="-122"/>
+                <a:cs typeface="Times New Roman" pitchFamily="34" charset="-120"/>
+              </a:rPr>
+              <a:t>Fill in the blanks:</a:t>
+            </a:r>
+            <a:endParaRPr lang="en-US" sz="4000" dirty="0"/>
+          </a:p>
+          <a:p>
+            <a:pPr algn="l" marL="342900" indent="-342900">
+              <a:spcAft>
+                <a:spcPts val="800"/>
+              </a:spcAft>
+              <a:buSzPct val="100000"/>
+              <a:buFont typeface="+mj-lt"/>
+              <a:buAutoNum type="arabicPeriod" startAt="1"/>
+            </a:pPr>
+            <a:r>
+              <a:rPr lang="en-US" sz="4000" dirty="0">
+                <a:solidFill>
+                  <a:srgbClr val="111111"/>
+                </a:solidFill>
+                <a:latin typeface="Times New Roman" pitchFamily="34" charset="0"/>
+                <a:ea typeface="Times New Roman" pitchFamily="34" charset="-122"/>
+                <a:cs typeface="Times New Roman" pitchFamily="34" charset="-120"/>
+              </a:rPr>
+              <a:t>Around the Equator, the climate is ______.</a:t>
+            </a:r>
+            <a:endParaRPr lang="en-US" sz="4000" dirty="0"/>
+          </a:p>
+          <a:p>
+            <a:pPr algn="l" marL="342900" indent="-342900">
+              <a:spcAft>
+                <a:spcPts val="800"/>
+              </a:spcAft>
+              <a:buSzPct val="100000"/>
+              <a:buFont typeface="+mj-lt"/>
+              <a:buAutoNum type="arabicPeriod" startAt="1"/>
+            </a:pPr>
+            <a:r>
+              <a:rPr lang="en-US" sz="4000" dirty="0">
+                <a:solidFill>
+                  <a:srgbClr val="111111"/>
+                </a:solidFill>
+                <a:latin typeface="Times New Roman" pitchFamily="34" charset="0"/>
+                <a:ea typeface="Times New Roman" pitchFamily="34" charset="-122"/>
+                <a:cs typeface="Times New Roman" pitchFamily="34" charset="-120"/>
+              </a:rPr>
+              <a:t>The long valley of East Africa is the Great ______ Valley.</a:t>
+            </a:r>
+            <a:endParaRPr lang="en-US" sz="4000" dirty="0"/>
+          </a:p>
+          <a:p>
+            <a:pPr algn="l" marL="342900" indent="-342900">
+              <a:spcAft>
+                <a:spcPts val="800"/>
+              </a:spcAft>
+              <a:buSzPct val="100000"/>
+              <a:buFont typeface="+mj-lt"/>
+              <a:buAutoNum type="arabicPeriod" startAt="1"/>
+            </a:pPr>
+            <a:r>
+              <a:rPr lang="en-US" sz="4000" dirty="0">
+                <a:solidFill>
+                  <a:srgbClr val="111111"/>
+                </a:solidFill>
+                <a:latin typeface="Times New Roman" pitchFamily="34" charset="0"/>
+                <a:ea typeface="Times New Roman" pitchFamily="34" charset="-122"/>
+                <a:cs typeface="Times New Roman" pitchFamily="34" charset="-120"/>
+              </a:rPr>
+              <a:t>Soils made from volcano rocks are ______ soils.</a:t>
+            </a:r>
+            <a:endParaRPr lang="en-US" sz="4000" dirty="0"/>
+          </a:p>
+        </p:txBody>
+      </p:sp>
+      <p:sp>
+        <p:nvSpPr>
+          <p:cNvPr id="25" name="Slide Number Placeholder 0"/>
+          <p:cNvSpPr>
+            <a:spLocks noGrp="1"/>
+          </p:cNvSpPr>
+          <p:nvPr>
+            <p:ph type="sldNum" sz="quarter" idx="4294967295"/>
+          </p:nvPr>
+        </p:nvSpPr>
+        <p:spPr>
+          <a:xfrm>
+            <a:off x="27432" y="91440"/>
+            <a:ext cx="585216" cy="475488"/>
+          </a:xfrm>
+          <a:prstGeom prst="rect">
+            <a:avLst/>
+          </a:prstGeom>
+          <a:extLst>
+            <a:ext uri="{C572A759-6A51-4108-AA02-DFA0A04FC94B}">
+              <ma14:wrappingTextBoxFlag xmlns:ma14="http://schemas.microsoft.com/office/mac/drawingml/2011/main" val="0"/>
+            </a:ext>
+          </a:extLst>
+        </p:spPr>
+        <p:txBody>
+          <a:bodyPr/>
+          <a:lstStyle>
+            <a:lvl1pPr>
+              <a:defRPr sz="2000">
+                <a:solidFill>
+                  <a:srgbClr val="FFFFFF"/>
+                </a:solidFill>
+                <a:latin typeface="Calibri"/>
+                <a:ea typeface="Calibri"/>
+                <a:cs typeface="Calibri"/>
+              </a:defRPr>
+            </a:lvl1pPr>
+          </a:lstStyle>
+          <a:p>
+            <a:pPr algn="ctr"/>
+            <a:fld id="{F7021451-1387-4CA6-816F-3879F97B5CBC}" type="slidenum">
+              <a:rPr b="1" lang="en-US"/>
+              <a:t>51</a:t>
+            </a:fld>
+            <a:endParaRPr lang="en-US"/>
+          </a:p>
+        </p:txBody>
+      </p:sp>
+    </p:spTree>
+  </p:cSld>
+  <p:clrMapOvr>
+    <a:masterClrMapping/>
+  </p:clrMapOvr>
+</p:sld>
+</file>
+
+<file path=ppt/slides/slide52.xml><?xml version="1.0" encoding="utf-8"?>
+<p:sld xmlns:a="http://schemas.openxmlformats.org/drawingml/2006/main" xmlns:r="http://schemas.openxmlformats.org/officeDocument/2006/relationships" xmlns:p="http://schemas.openxmlformats.org/presentationml/2006/main">
+  <p:cSld name="Slide 52">
+    <p:spTree>
+      <p:nvGrpSpPr>
+        <p:cNvPr id="1" name=""/>
+        <p:cNvGrpSpPr/>
+        <p:nvPr/>
+      </p:nvGrpSpPr>
+      <p:grpSpPr>
+        <a:xfrm>
+          <a:off x="0" y="0"/>
+          <a:ext cx="0" cy="0"/>
+          <a:chOff x="0" y="0"/>
+          <a:chExt cx="0" cy="0"/>
+        </a:xfrm>
+      </p:grpSpPr>
+      <p:sp>
+        <p:nvSpPr>
+          <p:cNvPr id="2" name="Text 0"/>
+          <p:cNvSpPr/>
+          <p:nvPr/>
+        </p:nvSpPr>
+        <p:spPr>
+          <a:xfrm>
+            <a:off x="457200" y="713232"/>
+            <a:ext cx="11368735" cy="274320"/>
+          </a:xfrm>
+          <a:prstGeom prst="rect">
+            <a:avLst/>
+          </a:prstGeom>
+          <a:noFill/>
+          <a:ln/>
+        </p:spPr>
+        <p:txBody>
+          <a:bodyPr wrap="square" lIns="0" tIns="0" rIns="0" bIns="0" rtlCol="0" anchor="ctr"/>
+          <a:lstStyle/>
+          <a:p>
+            <a:pPr algn="r" indent="0" marL="0">
+              <a:buNone/>
+            </a:pPr>
+            <a:r>
+              <a:rPr lang="en-US" sz="1400" b="1" dirty="0">
+                <a:solidFill>
+                  <a:srgbClr val="1C3F6E"/>
+                </a:solidFill>
+                <a:latin typeface="Calibri" pitchFamily="34" charset="0"/>
+                <a:ea typeface="Calibri" pitchFamily="34" charset="-122"/>
+                <a:cs typeface="Calibri" pitchFamily="34" charset="-120"/>
+              </a:rPr>
+              <a:t>HOMEWORK</a:t>
+            </a:r>
+            <a:endParaRPr lang="en-US" sz="1400" dirty="0"/>
+          </a:p>
+        </p:txBody>
+      </p:sp>
+      <p:pic>
+        <p:nvPicPr>
+          <p:cNvPr id="3" name="Image 0" descr="/home/claude/f4/img/minesec_sheet.png">    </p:cNvPr>
+          <p:cNvPicPr>
+            <a:picLocks noChangeAspect="1"/>
+          </p:cNvPicPr>
+          <p:nvPr/>
+        </p:nvPicPr>
+        <p:blipFill>
+          <a:blip r:embed="rId1"/>
+          <a:stretch>
+            <a:fillRect/>
+          </a:stretch>
+        </p:blipFill>
+        <p:spPr>
+          <a:xfrm>
+            <a:off x="0" y="658368"/>
+            <a:ext cx="5120640" cy="5833872"/>
+          </a:xfrm>
+          <a:prstGeom prst="rect">
+            <a:avLst/>
+          </a:prstGeom>
+        </p:spPr>
+      </p:pic>
+      <p:sp>
+        <p:nvSpPr>
+          <p:cNvPr id="4" name="Text 1"/>
+          <p:cNvSpPr/>
+          <p:nvPr/>
+        </p:nvSpPr>
+        <p:spPr>
+          <a:xfrm>
+            <a:off x="5349240" y="1005840"/>
+            <a:ext cx="6522415" cy="731520"/>
+          </a:xfrm>
+          <a:prstGeom prst="rect">
+            <a:avLst/>
+          </a:prstGeom>
+          <a:noFill/>
+          <a:ln/>
+        </p:spPr>
+        <p:txBody>
+          <a:bodyPr wrap="square" lIns="0" tIns="0" rIns="0" bIns="0" rtlCol="0" anchor="ctr">
+            <a:normAutofit/>
+          </a:bodyPr>
+          <a:lstStyle/>
+          <a:p>
+            <a:pPr algn="ctr" indent="0" marL="0">
+              <a:buNone/>
+            </a:pPr>
+            <a:r>
+              <a:rPr lang="en-US" sz="3600" b="1" dirty="0">
+                <a:solidFill>
+                  <a:srgbClr val="990011"/>
+                </a:solidFill>
+                <a:latin typeface="Times New Roman" pitchFamily="34" charset="0"/>
+                <a:ea typeface="Times New Roman" pitchFamily="34" charset="-122"/>
+                <a:cs typeface="Times New Roman" pitchFamily="34" charset="-120"/>
+              </a:rPr>
+              <a:t>Homework</a:t>
+            </a:r>
+            <a:endParaRPr lang="en-US" sz="3600" dirty="0"/>
+          </a:p>
+        </p:txBody>
+      </p:sp>
+      <p:sp>
+        <p:nvSpPr>
+          <p:cNvPr id="5" name="Text 2"/>
+          <p:cNvSpPr/>
+          <p:nvPr/>
+        </p:nvSpPr>
+        <p:spPr>
+          <a:xfrm>
+            <a:off x="5349240" y="1783080"/>
+            <a:ext cx="6522415" cy="4663440"/>
+          </a:xfrm>
+          <a:prstGeom prst="rect">
+            <a:avLst/>
+          </a:prstGeom>
+          <a:noFill/>
+          <a:ln/>
+        </p:spPr>
+        <p:txBody>
+          <a:bodyPr wrap="square" lIns="0" tIns="0" rIns="0" bIns="0" rtlCol="0" anchor="t"/>
+          <a:lstStyle/>
+          <a:p>
+            <a:pPr algn="l" indent="0" marL="0">
+              <a:spcAft>
+                <a:spcPts val="800"/>
+              </a:spcAft>
+              <a:buNone/>
+            </a:pPr>
+            <a:r>
+              <a:rPr lang="en-US" sz="4000" dirty="0">
+                <a:solidFill>
+                  <a:srgbClr val="111111"/>
+                </a:solidFill>
+                <a:latin typeface="Times New Roman" pitchFamily="34" charset="0"/>
+                <a:ea typeface="Times New Roman" pitchFamily="34" charset="-122"/>
+                <a:cs typeface="Times New Roman" pitchFamily="34" charset="-120"/>
+              </a:rPr>
+              <a:t>Look at a map of Africa and write the names of three big rivers. Say into which ocean or sea each one flows.</a:t>
+            </a:r>
+            <a:endParaRPr lang="en-US" sz="4000" dirty="0"/>
+          </a:p>
+        </p:txBody>
+      </p:sp>
+      <p:sp>
+        <p:nvSpPr>
+          <p:cNvPr id="25" name="Slide Number Placeholder 0"/>
+          <p:cNvSpPr>
+            <a:spLocks noGrp="1"/>
+          </p:cNvSpPr>
+          <p:nvPr>
+            <p:ph type="sldNum" sz="quarter" idx="4294967295"/>
+          </p:nvPr>
+        </p:nvSpPr>
+        <p:spPr>
+          <a:xfrm>
+            <a:off x="27432" y="91440"/>
+            <a:ext cx="585216" cy="475488"/>
+          </a:xfrm>
+          <a:prstGeom prst="rect">
+            <a:avLst/>
+          </a:prstGeom>
+          <a:extLst>
+            <a:ext uri="{C572A759-6A51-4108-AA02-DFA0A04FC94B}">
+              <ma14:wrappingTextBoxFlag xmlns:ma14="http://schemas.microsoft.com/office/mac/drawingml/2011/main" val="0"/>
+            </a:ext>
+          </a:extLst>
+        </p:spPr>
+        <p:txBody>
+          <a:bodyPr/>
+          <a:lstStyle>
+            <a:lvl1pPr>
+              <a:defRPr sz="2000">
+                <a:solidFill>
+                  <a:srgbClr val="FFFFFF"/>
+                </a:solidFill>
+                <a:latin typeface="Calibri"/>
+                <a:ea typeface="Calibri"/>
+                <a:cs typeface="Calibri"/>
+              </a:defRPr>
+            </a:lvl1pPr>
+          </a:lstStyle>
+          <a:p>
+            <a:pPr algn="ctr"/>
+            <a:fld id="{F7021451-1387-4CA6-816F-3879F97B5CBC}" type="slidenum">
+              <a:rPr b="1" lang="en-US"/>
+              <a:t>52</a:t>
+            </a:fld>
+            <a:endParaRPr lang="en-US"/>
+          </a:p>
+        </p:txBody>
+      </p:sp>
+    </p:spTree>
+  </p:cSld>
+  <p:clrMapOvr>
+    <a:masterClrMapping/>
+  </p:clrMapOvr>
+</p:sld>
+</file>
+
+<file path=ppt/slides/slide53.xml><?xml version="1.0" encoding="utf-8"?>
+<p:sld xmlns:a="http://schemas.openxmlformats.org/drawingml/2006/main" xmlns:r="http://schemas.openxmlformats.org/officeDocument/2006/relationships" xmlns:p="http://schemas.openxmlformats.org/presentationml/2006/main">
+  <p:cSld name="Slide 53">
+    <p:spTree>
+      <p:nvGrpSpPr>
+        <p:cNvPr id="1" name=""/>
+        <p:cNvGrpSpPr/>
+        <p:nvPr/>
+      </p:nvGrpSpPr>
+      <p:grpSpPr>
+        <a:xfrm>
+          <a:off x="0" y="0"/>
+          <a:ext cx="0" cy="0"/>
+          <a:chOff x="0" y="0"/>
+          <a:chExt cx="0" cy="0"/>
+        </a:xfrm>
+      </p:grpSpPr>
+      <p:sp>
+        <p:nvSpPr>
+          <p:cNvPr id="2" name="Text 0"/>
+          <p:cNvSpPr/>
+          <p:nvPr/>
+        </p:nvSpPr>
+        <p:spPr>
+          <a:xfrm>
+            <a:off x="457200" y="713232"/>
+            <a:ext cx="11368735" cy="274320"/>
+          </a:xfrm>
+          <a:prstGeom prst="rect">
+            <a:avLst/>
+          </a:prstGeom>
+          <a:noFill/>
+          <a:ln/>
+        </p:spPr>
+        <p:txBody>
+          <a:bodyPr wrap="square" lIns="0" tIns="0" rIns="0" bIns="0" rtlCol="0" anchor="ctr"/>
+          <a:lstStyle/>
+          <a:p>
+            <a:pPr algn="r" indent="0" marL="0">
+              <a:buNone/>
+            </a:pPr>
+            <a:r>
+              <a:rPr lang="en-US" sz="1400" b="1" dirty="0">
+                <a:solidFill>
+                  <a:srgbClr val="1C3F6E"/>
+                </a:solidFill>
+                <a:latin typeface="Calibri" pitchFamily="34" charset="0"/>
+                <a:ea typeface="Calibri" pitchFamily="34" charset="-122"/>
+                <a:cs typeface="Calibri" pitchFamily="34" charset="-120"/>
+              </a:rPr>
+              <a:t>NEXT LESSON</a:t>
+            </a:r>
+            <a:endParaRPr lang="en-US" sz="1400" dirty="0"/>
+          </a:p>
+        </p:txBody>
+      </p:sp>
+      <p:pic>
+        <p:nvPicPr>
+          <p:cNvPr id="3" name="Image 0" descr="/home/claude/f4/img/minesec_sheet.png">    </p:cNvPr>
+          <p:cNvPicPr>
+            <a:picLocks noChangeAspect="1"/>
+          </p:cNvPicPr>
+          <p:nvPr/>
+        </p:nvPicPr>
+        <p:blipFill>
+          <a:blip r:embed="rId1"/>
+          <a:stretch>
+            <a:fillRect/>
+          </a:stretch>
+        </p:blipFill>
+        <p:spPr>
+          <a:xfrm>
+            <a:off x="0" y="658368"/>
+            <a:ext cx="5120640" cy="5833872"/>
+          </a:xfrm>
+          <a:prstGeom prst="rect">
+            <a:avLst/>
+          </a:prstGeom>
+        </p:spPr>
+      </p:pic>
+      <p:sp>
+        <p:nvSpPr>
+          <p:cNvPr id="4" name="Text 1"/>
+          <p:cNvSpPr/>
+          <p:nvPr/>
+        </p:nvSpPr>
+        <p:spPr>
+          <a:xfrm>
+            <a:off x="5349240" y="1005840"/>
+            <a:ext cx="6522415" cy="731520"/>
+          </a:xfrm>
+          <a:prstGeom prst="rect">
+            <a:avLst/>
+          </a:prstGeom>
+          <a:noFill/>
+          <a:ln/>
+        </p:spPr>
+        <p:txBody>
+          <a:bodyPr wrap="square" lIns="0" tIns="0" rIns="0" bIns="0" rtlCol="0" anchor="ctr">
+            <a:normAutofit/>
+          </a:bodyPr>
+          <a:lstStyle/>
+          <a:p>
+            <a:pPr algn="ctr" indent="0" marL="0">
+              <a:buNone/>
+            </a:pPr>
+            <a:r>
+              <a:rPr lang="en-US" sz="3600" b="1" dirty="0">
+                <a:solidFill>
+                  <a:srgbClr val="990011"/>
+                </a:solidFill>
+                <a:latin typeface="Times New Roman" pitchFamily="34" charset="0"/>
+                <a:ea typeface="Times New Roman" pitchFamily="34" charset="-122"/>
+                <a:cs typeface="Times New Roman" pitchFamily="34" charset="-120"/>
+              </a:rPr>
+              <a:t>Next Lesson</a:t>
+            </a:r>
+            <a:endParaRPr lang="en-US" sz="3600" dirty="0"/>
+          </a:p>
+        </p:txBody>
+      </p:sp>
+      <p:sp>
+        <p:nvSpPr>
+          <p:cNvPr id="5" name="Text 2"/>
+          <p:cNvSpPr/>
+          <p:nvPr/>
+        </p:nvSpPr>
+        <p:spPr>
+          <a:xfrm>
+            <a:off x="5349240" y="1783080"/>
+            <a:ext cx="6522415" cy="4663440"/>
+          </a:xfrm>
+          <a:prstGeom prst="rect">
+            <a:avLst/>
+          </a:prstGeom>
+          <a:noFill/>
+          <a:ln/>
+        </p:spPr>
+        <p:txBody>
+          <a:bodyPr wrap="square" lIns="0" tIns="0" rIns="0" bIns="0" rtlCol="0" anchor="ctr"/>
+          <a:lstStyle/>
+          <a:p>
+            <a:pPr algn="ctr" indent="0" marL="0">
+              <a:spcAft>
+                <a:spcPts val="800"/>
+              </a:spcAft>
+              <a:buNone/>
+            </a:pPr>
+            <a:r>
+              <a:rPr lang="en-US" sz="4000" b="1" dirty="0">
+                <a:solidFill>
+                  <a:srgbClr val="111111"/>
+                </a:solidFill>
+                <a:latin typeface="Times New Roman" pitchFamily="34" charset="0"/>
+                <a:ea typeface="Times New Roman" pitchFamily="34" charset="-122"/>
+                <a:cs typeface="Times New Roman" pitchFamily="34" charset="-120"/>
+              </a:rPr>
+              <a:t>Our next lesson will be on:</a:t>
+            </a:r>
+            <a:endParaRPr lang="en-US" sz="4000" dirty="0"/>
+          </a:p>
+          <a:p>
+            <a:pPr algn="ctr" indent="0" marL="0">
+              <a:spcAft>
+                <a:spcPts val="800"/>
+              </a:spcAft>
+              <a:buNone/>
+            </a:pPr>
+            <a:r>
+              <a:rPr lang="en-US" sz="4000" b="1" dirty="0">
+                <a:solidFill>
+                  <a:srgbClr val="990011"/>
+                </a:solidFill>
+                <a:latin typeface="Times New Roman" pitchFamily="34" charset="0"/>
+                <a:ea typeface="Times New Roman" pitchFamily="34" charset="-122"/>
+                <a:cs typeface="Times New Roman" pitchFamily="34" charset="-120"/>
+              </a:rPr>
+              <a:t>Lesson 6 (Part 3): Africa: Vegetation and Drainage of Africa</a:t>
+            </a:r>
+            <a:endParaRPr lang="en-US" sz="4000" dirty="0"/>
+          </a:p>
+        </p:txBody>
+      </p:sp>
+      <p:sp>
+        <p:nvSpPr>
+          <p:cNvPr id="25" name="Slide Number Placeholder 0"/>
+          <p:cNvSpPr>
+            <a:spLocks noGrp="1"/>
+          </p:cNvSpPr>
+          <p:nvPr>
+            <p:ph type="sldNum" sz="quarter" idx="4294967295"/>
+          </p:nvPr>
+        </p:nvSpPr>
+        <p:spPr>
+          <a:xfrm>
+            <a:off x="27432" y="91440"/>
+            <a:ext cx="585216" cy="475488"/>
+          </a:xfrm>
+          <a:prstGeom prst="rect">
+            <a:avLst/>
+          </a:prstGeom>
+          <a:extLst>
+            <a:ext uri="{C572A759-6A51-4108-AA02-DFA0A04FC94B}">
+              <ma14:wrappingTextBoxFlag xmlns:ma14="http://schemas.microsoft.com/office/mac/drawingml/2011/main" val="0"/>
+            </a:ext>
+          </a:extLst>
+        </p:spPr>
+        <p:txBody>
+          <a:bodyPr/>
+          <a:lstStyle>
+            <a:lvl1pPr>
+              <a:defRPr sz="2000">
+                <a:solidFill>
+                  <a:srgbClr val="FFFFFF"/>
+                </a:solidFill>
+                <a:latin typeface="Calibri"/>
+                <a:ea typeface="Calibri"/>
+                <a:cs typeface="Calibri"/>
+              </a:defRPr>
+            </a:lvl1pPr>
+          </a:lstStyle>
+          <a:p>
+            <a:pPr algn="ctr"/>
+            <a:fld id="{F7021451-1387-4CA6-816F-3879F97B5CBC}" type="slidenum">
+              <a:rPr b="1" lang="en-US"/>
+              <a:t>53</a:t>
+            </a:fld>
+            <a:endParaRPr lang="en-US"/>
+          </a:p>
+        </p:txBody>
+      </p:sp>
+    </p:spTree>
+  </p:cSld>
+  <p:clrMapOvr>
+    <a:masterClrMapping/>
+  </p:clrMapOvr>
+</p:sld>
+</file>
+
+<file path=ppt/slides/slide54.xml><?xml version="1.0" encoding="utf-8"?>
+<p:sld xmlns:a="http://schemas.openxmlformats.org/drawingml/2006/main" xmlns:r="http://schemas.openxmlformats.org/officeDocument/2006/relationships" xmlns:p="http://schemas.openxmlformats.org/presentationml/2006/main">
+  <p:cSld name="Slide 54">
+    <p:spTree>
+      <p:nvGrpSpPr>
+        <p:cNvPr id="1" name=""/>
+        <p:cNvGrpSpPr/>
+        <p:nvPr/>
+      </p:nvGrpSpPr>
+      <p:grpSpPr>
+        <a:xfrm>
+          <a:off x="0" y="0"/>
+          <a:ext cx="0" cy="0"/>
+          <a:chOff x="0" y="0"/>
+          <a:chExt cx="0" cy="0"/>
+        </a:xfrm>
+      </p:grpSpPr>
+      <p:sp>
+        <p:nvSpPr>
+          <p:cNvPr id="2" name="Text 0"/>
+          <p:cNvSpPr/>
+          <p:nvPr/>
+        </p:nvSpPr>
+        <p:spPr>
+          <a:xfrm>
+            <a:off x="457200" y="713232"/>
+            <a:ext cx="11368735" cy="274320"/>
+          </a:xfrm>
+          <a:prstGeom prst="rect">
+            <a:avLst/>
+          </a:prstGeom>
+          <a:noFill/>
+          <a:ln/>
+        </p:spPr>
+        <p:txBody>
+          <a:bodyPr wrap="square" lIns="0" tIns="0" rIns="0" bIns="0" rtlCol="0" anchor="ctr"/>
+          <a:lstStyle/>
+          <a:p>
+            <a:pPr algn="r" indent="0" marL="0">
+              <a:buNone/>
+            </a:pPr>
+            <a:r>
+              <a:rPr lang="en-US" sz="1400" b="1" dirty="0">
+                <a:solidFill>
+                  <a:srgbClr val="1C3F6E"/>
+                </a:solidFill>
+                <a:latin typeface="Calibri" pitchFamily="34" charset="0"/>
+                <a:ea typeface="Calibri" pitchFamily="34" charset="-122"/>
+                <a:cs typeface="Calibri" pitchFamily="34" charset="-120"/>
+              </a:rPr>
               <a:t>BILINGUAL GAME</a:t>
             </a:r>
             <a:endParaRPr lang="en-US" sz="1400" dirty="0"/>
@@ -17361,7 +19398,7 @@
       </p:sp>
       <p:graphicFrame>
         <p:nvGraphicFramePr>
-          <p:cNvPr id="50" name="Table 0"/>
+          <p:cNvPr id="55" name="Table 0"/>
           <p:cNvGraphicFramePr>
             <a:graphicFrameLocks noGrp="1"/>
           </p:cNvGraphicFramePr>
@@ -18673,7 +20710,7 @@
             <a:pPr algn="ctr"/>
             <a:fld id="{F7021451-1387-4CA6-816F-3879F97B5CBC}" type="slidenum">
               <a:rPr b="1" lang="en-US"/>
-              <a:t>49</a:t>
+              <a:t>54</a:t>
             </a:fld>
             <a:endParaRPr lang="en-US"/>
           </a:p>
@@ -18687,9 +20724,9 @@
 </p:sld>
 </file>
 
-<file path=ppt/slides/slide5.xml><?xml version="1.0" encoding="utf-8"?>
+<file path=ppt/slides/slide55.xml><?xml version="1.0" encoding="utf-8"?>
 <p:sld xmlns:a="http://schemas.openxmlformats.org/drawingml/2006/main" xmlns:r="http://schemas.openxmlformats.org/officeDocument/2006/relationships" xmlns:p="http://schemas.openxmlformats.org/presentationml/2006/main">
-  <p:cSld name="Slide 5">
+  <p:cSld name="Slide 55">
     <p:spTree>
       <p:nvGrpSpPr>
         <p:cNvPr id="1" name=""/>
@@ -18737,225 +20774,6 @@
                 <a:ea typeface="Calibri" pitchFamily="34" charset="-122"/>
                 <a:cs typeface="Calibri" pitchFamily="34" charset="-120"/>
               </a:rPr>
-              <a:t>HOMEWORK CORRECTION</a:t>
-            </a:r>
-            <a:endParaRPr lang="en-US" sz="1400" dirty="0"/>
-          </a:p>
-        </p:txBody>
-      </p:sp>
-      <p:pic>
-        <p:nvPicPr>
-          <p:cNvPr id="3" name="Image 0" descr="/home/claude/f4/img/minesec_sheet.png">    </p:cNvPr>
-          <p:cNvPicPr>
-            <a:picLocks noChangeAspect="1"/>
-          </p:cNvPicPr>
-          <p:nvPr/>
-        </p:nvPicPr>
-        <p:blipFill>
-          <a:blip r:embed="rId1"/>
-          <a:stretch>
-            <a:fillRect/>
-          </a:stretch>
-        </p:blipFill>
-        <p:spPr>
-          <a:xfrm>
-            <a:off x="0" y="658368"/>
-            <a:ext cx="5120640" cy="5833872"/>
-          </a:xfrm>
-          <a:prstGeom prst="rect">
-            <a:avLst/>
-          </a:prstGeom>
-        </p:spPr>
-      </p:pic>
-      <p:sp>
-        <p:nvSpPr>
-          <p:cNvPr id="4" name="Text 1"/>
-          <p:cNvSpPr/>
-          <p:nvPr/>
-        </p:nvSpPr>
-        <p:spPr>
-          <a:xfrm>
-            <a:off x="5349240" y="1005840"/>
-            <a:ext cx="6522415" cy="731520"/>
-          </a:xfrm>
-          <a:prstGeom prst="rect">
-            <a:avLst/>
-          </a:prstGeom>
-          <a:noFill/>
-          <a:ln/>
-        </p:spPr>
-        <p:txBody>
-          <a:bodyPr wrap="square" lIns="0" tIns="0" rIns="0" bIns="0" rtlCol="0" anchor="ctr">
-            <a:normAutofit/>
-          </a:bodyPr>
-          <a:lstStyle/>
-          <a:p>
-            <a:pPr algn="ctr" indent="0" marL="0">
-              <a:buNone/>
-            </a:pPr>
-            <a:r>
-              <a:rPr lang="en-US" sz="3600" b="1" dirty="0">
-                <a:solidFill>
-                  <a:srgbClr val="990011"/>
-                </a:solidFill>
-                <a:latin typeface="Times New Roman" pitchFamily="34" charset="0"/>
-                <a:ea typeface="Times New Roman" pitchFamily="34" charset="-122"/>
-                <a:cs typeface="Times New Roman" pitchFamily="34" charset="-120"/>
-              </a:rPr>
-              <a:t>Correction: Possible Answer</a:t>
-            </a:r>
-            <a:endParaRPr lang="en-US" sz="3600" dirty="0"/>
-          </a:p>
-        </p:txBody>
-      </p:sp>
-      <p:sp>
-        <p:nvSpPr>
-          <p:cNvPr id="5" name="Text 2"/>
-          <p:cNvSpPr/>
-          <p:nvPr/>
-        </p:nvSpPr>
-        <p:spPr>
-          <a:xfrm>
-            <a:off x="5349240" y="1783080"/>
-            <a:ext cx="6522415" cy="4663440"/>
-          </a:xfrm>
-          <a:prstGeom prst="rect">
-            <a:avLst/>
-          </a:prstGeom>
-          <a:noFill/>
-          <a:ln/>
-        </p:spPr>
-        <p:txBody>
-          <a:bodyPr wrap="square" lIns="0" tIns="0" rIns="0" bIns="0" rtlCol="0" anchor="t"/>
-          <a:lstStyle/>
-          <a:p>
-            <a:pPr algn="l" indent="0" marL="0">
-              <a:spcAft>
-                <a:spcPts val="800"/>
-              </a:spcAft>
-              <a:buNone/>
-            </a:pPr>
-            <a:r>
-              <a:rPr lang="en-US" sz="4000" dirty="0">
-                <a:solidFill>
-                  <a:srgbClr val="111111"/>
-                </a:solidFill>
-                <a:latin typeface="Times New Roman" pitchFamily="34" charset="0"/>
-                <a:ea typeface="Times New Roman" pitchFamily="34" charset="-122"/>
-                <a:cs typeface="Times New Roman" pitchFamily="34" charset="-120"/>
-              </a:rPr>
-              <a:t>Douala is the wettest (about 4,000 mm of rain a year); Maroua is the driest (about 800 mm); Garoua is in between (about 1,000 mm).</a:t>
-            </a:r>
-            <a:endParaRPr lang="en-US" sz="4000" dirty="0"/>
-          </a:p>
-        </p:txBody>
-      </p:sp>
-      <p:sp>
-        <p:nvSpPr>
-          <p:cNvPr id="25" name="Slide Number Placeholder 0"/>
-          <p:cNvSpPr>
-            <a:spLocks noGrp="1"/>
-          </p:cNvSpPr>
-          <p:nvPr>
-            <p:ph type="sldNum" sz="quarter" idx="4294967295"/>
-          </p:nvPr>
-        </p:nvSpPr>
-        <p:spPr>
-          <a:xfrm>
-            <a:off x="27432" y="91440"/>
-            <a:ext cx="585216" cy="475488"/>
-          </a:xfrm>
-          <a:prstGeom prst="rect">
-            <a:avLst/>
-          </a:prstGeom>
-          <a:extLst>
-            <a:ext uri="{C572A759-6A51-4108-AA02-DFA0A04FC94B}">
-              <ma14:wrappingTextBoxFlag xmlns:ma14="http://schemas.microsoft.com/office/mac/drawingml/2011/main" val="0"/>
-            </a:ext>
-          </a:extLst>
-        </p:spPr>
-        <p:txBody>
-          <a:bodyPr/>
-          <a:lstStyle>
-            <a:lvl1pPr>
-              <a:defRPr sz="2000">
-                <a:solidFill>
-                  <a:srgbClr val="FFFFFF"/>
-                </a:solidFill>
-                <a:latin typeface="Calibri"/>
-                <a:ea typeface="Calibri"/>
-                <a:cs typeface="Calibri"/>
-              </a:defRPr>
-            </a:lvl1pPr>
-          </a:lstStyle>
-          <a:p>
-            <a:pPr algn="ctr"/>
-            <a:fld id="{F7021451-1387-4CA6-816F-3879F97B5CBC}" type="slidenum">
-              <a:rPr b="1" lang="en-US"/>
-              <a:t>5</a:t>
-            </a:fld>
-            <a:endParaRPr lang="en-US"/>
-          </a:p>
-        </p:txBody>
-      </p:sp>
-    </p:spTree>
-  </p:cSld>
-  <p:clrMapOvr>
-    <a:masterClrMapping/>
-  </p:clrMapOvr>
-</p:sld>
-</file>
-
-<file path=ppt/slides/slide50.xml><?xml version="1.0" encoding="utf-8"?>
-<p:sld xmlns:a="http://schemas.openxmlformats.org/drawingml/2006/main" xmlns:r="http://schemas.openxmlformats.org/officeDocument/2006/relationships" xmlns:p="http://schemas.openxmlformats.org/presentationml/2006/main">
-  <p:cSld name="Slide 50">
-    <p:spTree>
-      <p:nvGrpSpPr>
-        <p:cNvPr id="1" name=""/>
-        <p:cNvGrpSpPr/>
-        <p:nvPr/>
-      </p:nvGrpSpPr>
-      <p:grpSpPr>
-        <a:xfrm>
-          <a:off x="0" y="0"/>
-          <a:ext cx="0" cy="0"/>
-          <a:chOff x="0" y="0"/>
-          <a:chExt cx="0" cy="0"/>
-        </a:xfrm>
-      </p:grpSpPr>
-      <p:sp>
-        <p:nvSpPr>
-          <p:cNvPr id="2" name="Text 0"/>
-          <p:cNvSpPr/>
-          <p:nvPr/>
-        </p:nvSpPr>
-        <p:spPr>
-          <a:xfrm>
-            <a:off x="457200" y="713232"/>
-            <a:ext cx="11368735" cy="274320"/>
-          </a:xfrm>
-          <a:prstGeom prst="rect">
-            <a:avLst/>
-          </a:prstGeom>
-          <a:noFill/>
-          <a:ln/>
-        </p:spPr>
-        <p:txBody>
-          <a:bodyPr wrap="square" lIns="0" tIns="0" rIns="0" bIns="0" rtlCol="0" anchor="ctr"/>
-          <a:lstStyle/>
-          <a:p>
-            <a:pPr algn="r" indent="0" marL="0">
-              <a:buNone/>
-            </a:pPr>
-            <a:r>
-              <a:rPr lang="en-US" sz="1400" b="1" dirty="0">
-                <a:solidFill>
-                  <a:srgbClr val="1C3F6E"/>
-                </a:solidFill>
-                <a:latin typeface="Calibri" pitchFamily="34" charset="0"/>
-                <a:ea typeface="Calibri" pitchFamily="34" charset="-122"/>
-                <a:cs typeface="Calibri" pitchFamily="34" charset="-120"/>
-              </a:rPr>
               <a:t>LOGBOOK</a:t>
             </a:r>
             <a:endParaRPr lang="en-US" sz="1400" dirty="0"/>
@@ -19003,7 +20821,7 @@
       </p:sp>
       <p:graphicFrame>
         <p:nvGraphicFramePr>
-          <p:cNvPr id="51" name="Table 0"/>
+          <p:cNvPr id="56" name="Table 0"/>
           <p:cNvGraphicFramePr>
             <a:graphicFrameLocks noGrp="1"/>
           </p:cNvGraphicFramePr>
@@ -19625,7 +21443,7 @@
             <a:pPr algn="ctr"/>
             <a:fld id="{F7021451-1387-4CA6-816F-3879F97B5CBC}" type="slidenum">
               <a:rPr b="1" lang="en-US"/>
-              <a:t>50</a:t>
+              <a:t>55</a:t>
             </a:fld>
             <a:endParaRPr lang="en-US"/>
           </a:p>
@@ -19639,9 +21457,9 @@
 </p:sld>
 </file>
 
-<file path=ppt/slides/slide51.xml><?xml version="1.0" encoding="utf-8"?>
+<file path=ppt/slides/slide56.xml><?xml version="1.0" encoding="utf-8"?>
 <p:sld xmlns:a="http://schemas.openxmlformats.org/drawingml/2006/main" xmlns:r="http://schemas.openxmlformats.org/officeDocument/2006/relationships" xmlns:p="http://schemas.openxmlformats.org/presentationml/2006/main">
-  <p:cSld name="Slide 51">
+  <p:cSld name="Slide 56">
     <p:spTree>
       <p:nvGrpSpPr>
         <p:cNvPr id="1" name=""/>
@@ -19736,7 +21554,7 @@
       </p:sp>
       <p:graphicFrame>
         <p:nvGraphicFramePr>
-          <p:cNvPr id="52" name="Table 0"/>
+          <p:cNvPr id="57" name="Table 0"/>
           <p:cNvGraphicFramePr>
             <a:graphicFrameLocks noGrp="1"/>
           </p:cNvGraphicFramePr>
@@ -19846,7 +21664,7 @@
                           <a:ea typeface="Calibri" pitchFamily="34" charset="-122"/>
                           <a:cs typeface="Calibri" pitchFamily="34" charset="-120"/>
                         </a:rPr>
-                        <a:t>Climate; Relief; Soils.</a:t>
+                        <a:t>DEFINITIONS; Climate; Relief; Soils.</a:t>
                       </a:r>
                       <a:endParaRPr lang="en-US" sz="1600" dirty="0">
                         <a:latin typeface="Calibri" charset="0"/>
@@ -20496,7 +22314,7 @@
             <a:pPr algn="ctr"/>
             <a:fld id="{F7021451-1387-4CA6-816F-3879F97B5CBC}" type="slidenum">
               <a:rPr b="1" lang="en-US"/>
-              <a:t>51</a:t>
+              <a:t>56</a:t>
             </a:fld>
             <a:endParaRPr lang="en-US"/>
           </a:p>
@@ -20510,9 +22328,9 @@
 </p:sld>
 </file>
 
-<file path=ppt/slides/slide52.xml><?xml version="1.0" encoding="utf-8"?>
+<file path=ppt/slides/slide57.xml><?xml version="1.0" encoding="utf-8"?>
 <p:sld xmlns:a="http://schemas.openxmlformats.org/drawingml/2006/main" xmlns:r="http://schemas.openxmlformats.org/officeDocument/2006/relationships" xmlns:p="http://schemas.openxmlformats.org/presentationml/2006/main">
-  <p:cSld name="Slide 52">
+  <p:cSld name="Slide 57">
     <p:spTree>
       <p:nvGrpSpPr>
         <p:cNvPr id="1" name=""/>
@@ -20583,7 +22401,7 @@
         <p:spPr>
           <a:xfrm>
             <a:off x="0" y="658368"/>
-            <a:ext cx="2468880" cy="5833872"/>
+            <a:ext cx="3840480" cy="5833872"/>
           </a:xfrm>
           <a:prstGeom prst="rect">
             <a:avLst/>
@@ -20598,8 +22416,8 @@
         </p:nvSpPr>
         <p:spPr>
           <a:xfrm>
-            <a:off x="2697480" y="1005840"/>
-            <a:ext cx="9174175" cy="731520"/>
+            <a:off x="4069080" y="1005840"/>
+            <a:ext cx="7802575" cy="731520"/>
           </a:xfrm>
           <a:prstGeom prst="rect">
             <a:avLst/>
@@ -20639,8 +22457,8 @@
         </p:nvSpPr>
         <p:spPr>
           <a:xfrm>
-            <a:off x="2697480" y="1783080"/>
-            <a:ext cx="9174175" cy="4663440"/>
+            <a:off x="4069080" y="1783080"/>
+            <a:ext cx="7802575" cy="4663440"/>
           </a:xfrm>
           <a:prstGeom prst="rect">
             <a:avLst/>
@@ -20689,7 +22507,7 @@
                 <a:ea typeface="Calibri" pitchFamily="34" charset="-122"/>
                 <a:cs typeface="Calibri" pitchFamily="34" charset="-120"/>
               </a:rPr>
-              <a:t>Without the projector (Activity 1): draw the Equator and bands of climate on the board.</a:t>
+              <a:t>Without the projector (Activity 1): draw climate belts.</a:t>
             </a:r>
             <a:endParaRPr lang="en-US" sz="2000" dirty="0"/>
           </a:p>
@@ -20731,7 +22549,7 @@
                 <a:ea typeface="Calibri" pitchFamily="34" charset="-122"/>
                 <a:cs typeface="Calibri" pitchFamily="34" charset="-120"/>
               </a:rPr>
-              <a:t>Without the projector (Activity 3): show two books pushed apart with a pencil falling between them.</a:t>
+              <a:t>Without the projector (Activity 3): show it on a map.</a:t>
             </a:r>
             <a:endParaRPr lang="en-US" sz="2000" dirty="0"/>
           </a:p>
@@ -20752,7 +22570,7 @@
                 <a:ea typeface="Calibri" pitchFamily="34" charset="-122"/>
                 <a:cs typeface="Calibri" pitchFamily="34" charset="-120"/>
               </a:rPr>
-              <a:t>Without the projector (Activity 4): fold a sheet of paper to show folding.</a:t>
+              <a:t>Without the projector (Activity 4): show them on a map.</a:t>
             </a:r>
             <a:endParaRPr lang="en-US" sz="2000" dirty="0"/>
           </a:p>
@@ -20773,7 +22591,7 @@
                 <a:ea typeface="Calibri" pitchFamily="34" charset="-122"/>
                 <a:cs typeface="Calibri" pitchFamily="34" charset="-120"/>
               </a:rPr>
-              <a:t>Without the projector (Activity 5): ask learners what grows around Buea and Limbe.</a:t>
+              <a:t>Without the projector (Activity 5): name crops of the South-West.</a:t>
             </a:r>
             <a:endParaRPr lang="en-US" sz="2000" dirty="0"/>
           </a:p>
@@ -20821,7 +22639,7 @@
             <a:pPr algn="ctr"/>
             <a:fld id="{F7021451-1387-4CA6-816F-3879F97B5CBC}" type="slidenum">
               <a:rPr b="1" lang="en-US"/>
-              <a:t>52</a:t>
+              <a:t>57</a:t>
             </a:fld>
             <a:endParaRPr lang="en-US"/>
           </a:p>
@@ -20835,9 +22653,9 @@
 </p:sld>
 </file>
 
-<file path=ppt/slides/slide53.xml><?xml version="1.0" encoding="utf-8"?>
+<file path=ppt/slides/slide58.xml><?xml version="1.0" encoding="utf-8"?>
 <p:sld xmlns:a="http://schemas.openxmlformats.org/drawingml/2006/main" xmlns:r="http://schemas.openxmlformats.org/officeDocument/2006/relationships" xmlns:p="http://schemas.openxmlformats.org/presentationml/2006/main">
-  <p:cSld name="Slide 53">
+  <p:cSld name="Slide 58">
     <p:spTree>
       <p:nvGrpSpPr>
         <p:cNvPr id="1" name=""/>
@@ -21146,7 +22964,7 @@
             <a:pPr algn="ctr"/>
             <a:fld id="{F7021451-1387-4CA6-816F-3879F97B5CBC}" type="slidenum">
               <a:rPr b="1" lang="en-US"/>
-              <a:t>53</a:t>
+              <a:t>58</a:t>
             </a:fld>
             <a:endParaRPr lang="en-US"/>
           </a:p>

--- a/lecons/F2T/27_S21_L6_P2_Africa_Climate_Soils_Relief.pptx
+++ b/lecons/F2T/27_S21_L6_P2_Africa_Climate_Soils_Relief.pptx
@@ -3463,7 +3463,7 @@
           <a:p>
             <a:r>
               <a:rPr lang="en-US" dirty="0"/>
-              <a:t>Before we start the new lesson, let us correct the homework I gave you at the end of Lesson 6 (Part 1): Africa: Introduction (Location and Physical Characteristics). The question was: Compare the climate of Douala, Garoua and Maroua. Which town is the wettest, and which is the driest? Ask an adult or use your textbook. Take out your exercise books.</a:t>
+              <a:t>Before we start the new lesson, let us correct the homework I gave you at the end of Lesson 6 (Part 1): Africa: Introduction (Location and Physical Characteristics). The question was: Name three climates of Africa. Take out your exercise books.</a:t>
             </a:r>
             <a:endParaRPr lang="en-US" dirty="0"/>
           </a:p>
@@ -4431,7 +4431,7 @@
           <a:p>
             <a:r>
               <a:rPr lang="en-US" dirty="0"/>
-              <a:t>Here is a good answer. Douala is the wettest (about 4,000 mm of rain a year); Maroua is the driest (about 800 mm); Garoua is in between (about 1,000 mm). Compare it with your own answer and correct your work in red.</a:t>
+              <a:t>Here is a good answer. Equatorial, tropical (savanna) and desert. Compare it with your own answer and correct your work in red.</a:t>
             </a:r>
             <a:endParaRPr lang="en-US" dirty="0"/>
           </a:p>
@@ -4695,7 +4695,7 @@
           <a:p>
             <a:r>
               <a:rPr lang="en-US" dirty="0"/>
-              <a:t>For your homework: Look at a map of Africa and write the names of three big rivers. Say into which ocean or sea each one flows. We shall correct it at the beginning of our next lesson.</a:t>
+              <a:t>For your homework: Name three big rivers of Africa. We shall correct it at the beginning of our next lesson.</a:t>
             </a:r>
             <a:endParaRPr lang="en-US" dirty="0"/>
           </a:p>
@@ -15416,7 +15416,7 @@
         <p:spPr>
           <a:xfrm>
             <a:off x="0" y="658368"/>
-            <a:ext cx="2468880" cy="5833872"/>
+            <a:ext cx="5120640" cy="5833872"/>
           </a:xfrm>
           <a:prstGeom prst="rect">
             <a:avLst/>
@@ -15431,8 +15431,8 @@
         </p:nvSpPr>
         <p:spPr>
           <a:xfrm>
-            <a:off x="2697480" y="1005840"/>
-            <a:ext cx="9174175" cy="731520"/>
+            <a:off x="5349240" y="1005840"/>
+            <a:ext cx="6522415" cy="731520"/>
           </a:xfrm>
           <a:prstGeom prst="rect">
             <a:avLst/>
@@ -15472,8 +15472,8 @@
         </p:nvSpPr>
         <p:spPr>
           <a:xfrm>
-            <a:off x="2697480" y="1783080"/>
-            <a:ext cx="9174175" cy="4663440"/>
+            <a:off x="5349240" y="1783080"/>
+            <a:ext cx="6522415" cy="4663440"/>
           </a:xfrm>
           <a:prstGeom prst="rect">
             <a:avLst/>
@@ -15520,7 +15520,7 @@
                 <a:ea typeface="Times New Roman" pitchFamily="34" charset="-122"/>
                 <a:cs typeface="Times New Roman" pitchFamily="34" charset="-120"/>
               </a:rPr>
-              <a:t>Compare the climate of Douala, Garoua and Maroua. Which town is the wettest, and which is the driest? Ask an adult or use your textbook.</a:t>
+              <a:t>Name three climates of Africa.</a:t>
             </a:r>
             <a:endParaRPr lang="en-US" sz="4000" dirty="0"/>
           </a:p>
@@ -18277,7 +18277,7 @@
                 <a:ea typeface="Times New Roman" pitchFamily="34" charset="-122"/>
                 <a:cs typeface="Times New Roman" pitchFamily="34" charset="-120"/>
               </a:rPr>
-              <a:t>Douala is the wettest (about 4,000 mm of rain a year); Maroua is the driest (about 800 mm); Garoua is in between (about 1,000 mm).</a:t>
+              <a:t>Equatorial, tropical (savanna) and desert.</a:t>
             </a:r>
             <a:endParaRPr lang="en-US" sz="4000" dirty="0"/>
           </a:p>
@@ -19000,7 +19000,7 @@
                 <a:ea typeface="Times New Roman" pitchFamily="34" charset="-122"/>
                 <a:cs typeface="Times New Roman" pitchFamily="34" charset="-120"/>
               </a:rPr>
-              <a:t>Look at a map of Africa and write the names of three big rivers. Say into which ocean or sea each one flows.</a:t>
+              <a:t>Name three big rivers of Africa.</a:t>
             </a:r>
             <a:endParaRPr lang="en-US" sz="4000" dirty="0"/>
           </a:p>
@@ -21940,7 +21940,7 @@
                           <a:ea typeface="Calibri" pitchFamily="34" charset="-122"/>
                           <a:cs typeface="Calibri" pitchFamily="34" charset="-120"/>
                         </a:rPr>
-                        <a:t>Look at a map of Africa and write the names of three big rivers. Say into which ocean or sea each one flows.</a:t>
+                        <a:t>Name three big rivers of Africa.</a:t>
                       </a:r>
                       <a:endParaRPr lang="en-US" sz="1600" dirty="0">
                         <a:latin typeface="Calibri" charset="0"/>
